--- a/ClassMaterials/SimpleObjects/Slides/Part2-ObjectRefs.pptx
+++ b/ClassMaterials/SimpleObjects/Slides/Part2-ObjectRefs.pptx
@@ -5,32 +5,31 @@
     <p:sldMasterId id="2147483661" r:id="rId4"/>
   </p:sldMasterIdLst>
   <p:notesMasterIdLst>
-    <p:notesMasterId r:id="rId28"/>
+    <p:notesMasterId r:id="rId27"/>
   </p:notesMasterIdLst>
   <p:sldIdLst>
-    <p:sldId id="276" r:id="rId5"/>
-    <p:sldId id="257" r:id="rId6"/>
-    <p:sldId id="259" r:id="rId7"/>
-    <p:sldId id="256" r:id="rId8"/>
-    <p:sldId id="261" r:id="rId9"/>
-    <p:sldId id="262" r:id="rId10"/>
-    <p:sldId id="263" r:id="rId11"/>
-    <p:sldId id="275" r:id="rId12"/>
-    <p:sldId id="274" r:id="rId13"/>
-    <p:sldId id="277" r:id="rId14"/>
-    <p:sldId id="266" r:id="rId15"/>
-    <p:sldId id="273" r:id="rId16"/>
-    <p:sldId id="268" r:id="rId17"/>
-    <p:sldId id="278" r:id="rId18"/>
-    <p:sldId id="269" r:id="rId19"/>
-    <p:sldId id="279" r:id="rId20"/>
-    <p:sldId id="270" r:id="rId21"/>
-    <p:sldId id="271" r:id="rId22"/>
-    <p:sldId id="280" r:id="rId23"/>
-    <p:sldId id="281" r:id="rId24"/>
-    <p:sldId id="393" r:id="rId25"/>
-    <p:sldId id="272" r:id="rId26"/>
-    <p:sldId id="394" r:id="rId27"/>
+    <p:sldId id="257" r:id="rId5"/>
+    <p:sldId id="259" r:id="rId6"/>
+    <p:sldId id="256" r:id="rId7"/>
+    <p:sldId id="261" r:id="rId8"/>
+    <p:sldId id="262" r:id="rId9"/>
+    <p:sldId id="263" r:id="rId10"/>
+    <p:sldId id="275" r:id="rId11"/>
+    <p:sldId id="274" r:id="rId12"/>
+    <p:sldId id="277" r:id="rId13"/>
+    <p:sldId id="266" r:id="rId14"/>
+    <p:sldId id="273" r:id="rId15"/>
+    <p:sldId id="268" r:id="rId16"/>
+    <p:sldId id="278" r:id="rId17"/>
+    <p:sldId id="269" r:id="rId18"/>
+    <p:sldId id="279" r:id="rId19"/>
+    <p:sldId id="270" r:id="rId20"/>
+    <p:sldId id="271" r:id="rId21"/>
+    <p:sldId id="280" r:id="rId22"/>
+    <p:sldId id="281" r:id="rId23"/>
+    <p:sldId id="393" r:id="rId24"/>
+    <p:sldId id="272" r:id="rId25"/>
+    <p:sldId id="394" r:id="rId26"/>
   </p:sldIdLst>
   <p:sldSz cx="9144000" cy="6858000" type="screen4x3"/>
   <p:notesSz cx="7315200" cy="9601200"/>
@@ -518,29 +517,19 @@
       </p:grpSpPr>
       <p:sp>
         <p:nvSpPr>
-          <p:cNvPr id="30722" name="Slide Image Placeholder 1"/>
+          <p:cNvPr id="2" name="Slide Image Placeholder 1"/>
           <p:cNvSpPr>
-            <a:spLocks noGrp="1" noRot="1" noChangeAspect="1" noTextEdit="1"/>
+            <a:spLocks noGrp="1" noRot="1" noChangeAspect="1"/>
           </p:cNvSpPr>
           <p:nvPr>
             <p:ph type="sldImg"/>
           </p:nvPr>
         </p:nvSpPr>
-        <p:spPr bwMode="auto">
-          <a:noFill/>
-          <a:ln>
-            <a:solidFill>
-              <a:srgbClr val="000000"/>
-            </a:solidFill>
-            <a:miter lim="800000"/>
-            <a:headEnd/>
-            <a:tailEnd/>
-          </a:ln>
-        </p:spPr>
+        <p:spPr/>
       </p:sp>
       <p:sp>
         <p:nvSpPr>
-          <p:cNvPr id="30723" name="Notes Placeholder 2"/>
+          <p:cNvPr id="3" name="Notes Placeholder 2"/>
           <p:cNvSpPr>
             <a:spLocks noGrp="1"/>
           </p:cNvSpPr>
@@ -548,89 +537,38 @@
             <p:ph type="body" idx="1"/>
           </p:nvPr>
         </p:nvSpPr>
-        <p:spPr>
-          <a:noFill/>
-          <a:ln/>
-        </p:spPr>
+        <p:spPr/>
         <p:txBody>
           <a:bodyPr/>
           <a:lstStyle/>
           <a:p>
-            <a:pPr marL="0" marR="0" lvl="0" indent="0" algn="l" defTabSz="914400" rtl="0" eaLnBrk="1" fontAlgn="auto" latinLnBrk="0" hangingPunct="1">
-              <a:lnSpc>
-                <a:spcPct val="100000"/>
-              </a:lnSpc>
-              <a:spcBef>
-                <a:spcPct val="0"/>
-              </a:spcBef>
-              <a:spcAft>
-                <a:spcPts val="0"/>
-              </a:spcAft>
-              <a:buClrTx/>
-              <a:buSzTx/>
-              <a:buFontTx/>
-              <a:buNone/>
-              <a:tabLst/>
-              <a:defRPr/>
-            </a:pPr>
-            <a:r>
-              <a:rPr lang="en-US" dirty="0"/>
-              <a:t>JAY: Introduce FOURTH row today (Identity Pie)</a:t>
-            </a:r>
-          </a:p>
-          <a:p>
-            <a:pPr marL="0" marR="0" lvl="0" indent="0" algn="l" defTabSz="914400" rtl="0" eaLnBrk="1" fontAlgn="auto" latinLnBrk="0" hangingPunct="1">
-              <a:lnSpc>
-                <a:spcPct val="100000"/>
-              </a:lnSpc>
-              <a:spcBef>
-                <a:spcPct val="0"/>
-              </a:spcBef>
-              <a:spcAft>
-                <a:spcPts val="0"/>
-              </a:spcAft>
-              <a:buClrTx/>
-              <a:buSzTx/>
-              <a:buFontTx/>
-              <a:buNone/>
-              <a:tabLst/>
-              <a:defRPr/>
-            </a:pPr>
-            <a:r>
-              <a:rPr lang="en-US"/>
-              <a:t>Aim to start quiz with 5+ minutes to spare in the first hour.</a:t>
-            </a:r>
-          </a:p>
-          <a:p>
-            <a:pPr eaLnBrk="1" hangingPunct="1">
-              <a:spcBef>
-                <a:spcPct val="0"/>
-              </a:spcBef>
-            </a:pPr>
-            <a:endParaRPr lang="en-US" dirty="0"/>
+            <a:endParaRPr lang="en-US"/>
           </a:p>
         </p:txBody>
       </p:sp>
       <p:sp>
         <p:nvSpPr>
-          <p:cNvPr id="30724" name="Slide Number Placeholder 3"/>
+          <p:cNvPr id="4" name="Slide Number Placeholder 3"/>
           <p:cNvSpPr>
             <a:spLocks noGrp="1"/>
           </p:cNvSpPr>
           <p:nvPr>
-            <p:ph type="sldNum" sz="quarter" idx="5"/>
+            <p:ph type="sldNum" sz="quarter" idx="10"/>
           </p:nvPr>
         </p:nvSpPr>
-        <p:spPr>
-          <a:noFill/>
-        </p:spPr>
+        <p:spPr/>
         <p:txBody>
           <a:bodyPr/>
           <a:lstStyle/>
           <a:p>
-            <a:fld id="{CDC4E740-43A9-4CB1-B37F-A3A8D36E5746}" type="slidenum">
+            <a:pPr>
+              <a:defRPr/>
+            </a:pPr>
+            <a:fld id="{F3BF035C-C190-4FBE-9474-8535FCFBFED8}" type="slidenum">
               <a:rPr lang="en-US" smtClean="0"/>
-              <a:pPr/>
+              <a:pPr>
+                <a:defRPr/>
+              </a:pPr>
               <a:t>1</a:t>
             </a:fld>
             <a:endParaRPr lang="en-US"/>
@@ -640,7 +578,7 @@
     </p:spTree>
     <p:extLst>
       <p:ext uri="{BB962C8B-B14F-4D97-AF65-F5344CB8AC3E}">
-        <p14:creationId xmlns:p14="http://schemas.microsoft.com/office/powerpoint/2010/main" val="256276142"/>
+        <p14:creationId xmlns:p14="http://schemas.microsoft.com/office/powerpoint/2010/main" val="2537505001"/>
       </p:ext>
     </p:extLst>
   </p:cSld>
@@ -669,29 +607,19 @@
       </p:grpSpPr>
       <p:sp>
         <p:nvSpPr>
-          <p:cNvPr id="30722" name="Slide Image Placeholder 1"/>
+          <p:cNvPr id="2" name="Slide Image Placeholder 1"/>
           <p:cNvSpPr>
-            <a:spLocks noGrp="1" noRot="1" noChangeAspect="1" noTextEdit="1"/>
+            <a:spLocks noGrp="1" noRot="1" noChangeAspect="1"/>
           </p:cNvSpPr>
           <p:nvPr>
             <p:ph type="sldImg"/>
           </p:nvPr>
         </p:nvSpPr>
-        <p:spPr bwMode="auto">
-          <a:noFill/>
-          <a:ln>
-            <a:solidFill>
-              <a:srgbClr val="000000"/>
-            </a:solidFill>
-            <a:miter lim="800000"/>
-            <a:headEnd/>
-            <a:tailEnd/>
-          </a:ln>
-        </p:spPr>
+        <p:spPr/>
       </p:sp>
       <p:sp>
         <p:nvSpPr>
-          <p:cNvPr id="30723" name="Notes Placeholder 2"/>
+          <p:cNvPr id="3" name="Notes Placeholder 2"/>
           <p:cNvSpPr>
             <a:spLocks noGrp="1"/>
           </p:cNvSpPr>
@@ -699,174 +627,42 @@
             <p:ph type="body" idx="1"/>
           </p:nvPr>
         </p:nvSpPr>
-        <p:spPr>
-          <a:noFill/>
-          <a:ln/>
-        </p:spPr>
+        <p:spPr/>
         <p:txBody>
           <a:bodyPr/>
           <a:lstStyle/>
           <a:p>
             <a:r>
-              <a:rPr lang="en-US" sz="1200" b="0" strike="noStrike" spc="-1" dirty="0">
-                <a:solidFill>
-                  <a:srgbClr val="000000"/>
-                </a:solidFill>
-                <a:uFill>
-                  <a:solidFill>
-                    <a:srgbClr val="FFFFFF"/>
-                  </a:solidFill>
-                </a:uFill>
-                <a:latin typeface="Arial"/>
-              </a:rPr>
-              <a:t>Start at second hour 0:30 minutes to have </a:t>
-            </a:r>
-            <a:r>
-              <a:rPr lang="en-US" sz="1200" b="0" strike="noStrike" spc="-1">
-                <a:solidFill>
-                  <a:srgbClr val="000000"/>
-                </a:solidFill>
-                <a:uFill>
-                  <a:solidFill>
-                    <a:srgbClr val="FFFFFF"/>
-                  </a:solidFill>
-                </a:uFill>
-                <a:latin typeface="Arial"/>
-              </a:rPr>
-              <a:t>the 20 </a:t>
-            </a:r>
-            <a:r>
-              <a:rPr lang="en-US" sz="1200" b="0" strike="noStrike" spc="-1" dirty="0">
-                <a:solidFill>
-                  <a:srgbClr val="000000"/>
-                </a:solidFill>
-                <a:uFill>
-                  <a:solidFill>
-                    <a:srgbClr val="FFFFFF"/>
-                  </a:solidFill>
-                </a:uFill>
-                <a:latin typeface="Arial"/>
-              </a:rPr>
-              <a:t>minutes needed to go over this</a:t>
-            </a:r>
-          </a:p>
-          <a:p>
-            <a:endParaRPr lang="en-US" sz="1200" b="0" strike="noStrike" spc="-1" dirty="0">
-              <a:solidFill>
-                <a:srgbClr val="000000"/>
-              </a:solidFill>
-              <a:uFill>
-                <a:solidFill>
-                  <a:srgbClr val="FFFFFF"/>
-                </a:solidFill>
-              </a:uFill>
-              <a:latin typeface="Arial"/>
-            </a:endParaRPr>
-          </a:p>
-          <a:p>
-            <a:r>
-              <a:rPr lang="en-US" sz="1200" b="0" strike="noStrike" spc="-1" dirty="0">
-                <a:solidFill>
-                  <a:srgbClr val="000000"/>
-                </a:solidFill>
-                <a:uFill>
-                  <a:solidFill>
-                    <a:srgbClr val="FFFFFF"/>
-                  </a:solidFill>
-                </a:uFill>
-                <a:latin typeface="Arial"/>
-              </a:rPr>
-              <a:t>Look at schedule, EXAM soon! Non-coding/Written part first, programming part second.</a:t>
-            </a:r>
-          </a:p>
-          <a:p>
-            <a:r>
-              <a:rPr lang="en-US" sz="1200" b="0" strike="noStrike" spc="-1" dirty="0">
-                <a:solidFill>
-                  <a:srgbClr val="000000"/>
-                </a:solidFill>
-                <a:uFill>
-                  <a:solidFill>
-                    <a:srgbClr val="FFFFFF"/>
-                  </a:solidFill>
-                </a:uFill>
-                <a:latin typeface="Arial"/>
-              </a:rPr>
-              <a:t>Review Exams</a:t>
-            </a:r>
-          </a:p>
-          <a:p>
-            <a:r>
-              <a:rPr lang="en-US" sz="1200" b="0" strike="noStrike" spc="-1" dirty="0">
-                <a:solidFill>
-                  <a:srgbClr val="000000"/>
-                </a:solidFill>
-                <a:uFill>
-                  <a:solidFill>
-                    <a:srgbClr val="FFFFFF"/>
-                  </a:solidFill>
-                </a:uFill>
-                <a:latin typeface="Arial"/>
-              </a:rPr>
-              <a:t>Grades</a:t>
-            </a:r>
-            <a:r>
-              <a:rPr lang="en-US" sz="1200" b="0" strike="noStrike" spc="-1" baseline="0" dirty="0">
-                <a:solidFill>
-                  <a:srgbClr val="000000"/>
-                </a:solidFill>
-                <a:uFill>
-                  <a:solidFill>
-                    <a:srgbClr val="FFFFFF"/>
-                  </a:solidFill>
-                </a:uFill>
-                <a:latin typeface="Arial"/>
-              </a:rPr>
-              <a:t> – see me at break or after class if you feel your grade is wrong.</a:t>
-            </a:r>
-            <a:endParaRPr lang="en-US" sz="1200" b="0" strike="noStrike" spc="-1" dirty="0">
-              <a:solidFill>
-                <a:srgbClr val="000000"/>
-              </a:solidFill>
-              <a:uFill>
-                <a:solidFill>
-                  <a:srgbClr val="FFFFFF"/>
-                </a:solidFill>
-              </a:uFill>
-              <a:latin typeface="Arial"/>
-            </a:endParaRPr>
-          </a:p>
-          <a:p>
-            <a:pPr eaLnBrk="1" hangingPunct="1">
-              <a:spcBef>
-                <a:spcPct val="0"/>
-              </a:spcBef>
-            </a:pPr>
-            <a:endParaRPr lang="en-US" dirty="0"/>
+              <a:rPr lang="en-US" dirty="0"/>
+              <a:t>Yoder- I don’t use this normally</a:t>
+            </a:r>
           </a:p>
         </p:txBody>
       </p:sp>
       <p:sp>
         <p:nvSpPr>
-          <p:cNvPr id="30724" name="Slide Number Placeholder 3"/>
+          <p:cNvPr id="4" name="Slide Number Placeholder 3"/>
           <p:cNvSpPr>
             <a:spLocks noGrp="1"/>
           </p:cNvSpPr>
           <p:nvPr>
-            <p:ph type="sldNum" sz="quarter" idx="5"/>
+            <p:ph type="sldNum" sz="quarter" idx="10"/>
           </p:nvPr>
         </p:nvSpPr>
-        <p:spPr>
-          <a:noFill/>
-        </p:spPr>
+        <p:spPr/>
         <p:txBody>
           <a:bodyPr/>
           <a:lstStyle/>
           <a:p>
-            <a:fld id="{CDC4E740-43A9-4CB1-B37F-A3A8D36E5746}" type="slidenum">
+            <a:pPr>
+              <a:defRPr/>
+            </a:pPr>
+            <a:fld id="{F3BF035C-C190-4FBE-9474-8535FCFBFED8}" type="slidenum">
               <a:rPr lang="en-US" smtClean="0"/>
-              <a:pPr/>
-              <a:t>10</a:t>
+              <a:pPr>
+                <a:defRPr/>
+              </a:pPr>
+              <a:t>12</a:t>
             </a:fld>
             <a:endParaRPr lang="en-US"/>
           </a:p>
@@ -875,7 +671,7 @@
     </p:spTree>
     <p:extLst>
       <p:ext uri="{BB962C8B-B14F-4D97-AF65-F5344CB8AC3E}">
-        <p14:creationId xmlns:p14="http://schemas.microsoft.com/office/powerpoint/2010/main" val="256276142"/>
+        <p14:creationId xmlns:p14="http://schemas.microsoft.com/office/powerpoint/2010/main" val="2391102015"/>
       </p:ext>
     </p:extLst>
   </p:cSld>
@@ -930,9 +726,34 @@
           <a:lstStyle/>
           <a:p>
             <a:r>
+              <a:rPr lang="en-US" dirty="0" err="1"/>
+              <a:t>Math.pow</a:t>
+            </a:r>
+            <a:r>
               <a:rPr lang="en-US" dirty="0"/>
-              <a:t>Yoder- I don’t use this normally</a:t>
-            </a:r>
+              <a:t>( )</a:t>
+            </a:r>
+          </a:p>
+          <a:p>
+            <a:r>
+              <a:rPr lang="en-US" dirty="0" err="1"/>
+              <a:t>Math.sqrt</a:t>
+            </a:r>
+            <a:r>
+              <a:rPr lang="en-US" dirty="0"/>
+              <a:t>( )</a:t>
+            </a:r>
+          </a:p>
+          <a:p>
+            <a:r>
+              <a:rPr lang="en-US" dirty="0"/>
+              <a:t>Utilities,</a:t>
+            </a:r>
+            <a:r>
+              <a:rPr lang="en-US" baseline="0" dirty="0"/>
+              <a:t> nothing specific to an instance</a:t>
+            </a:r>
+            <a:endParaRPr lang="en-US" dirty="0"/>
           </a:p>
         </p:txBody>
       </p:sp>
@@ -968,7 +789,7 @@
     </p:spTree>
     <p:extLst>
       <p:ext uri="{BB962C8B-B14F-4D97-AF65-F5344CB8AC3E}">
-        <p14:creationId xmlns:p14="http://schemas.microsoft.com/office/powerpoint/2010/main" val="2391102015"/>
+        <p14:creationId xmlns:p14="http://schemas.microsoft.com/office/powerpoint/2010/main" val="478556958"/>
       </p:ext>
     </p:extLst>
   </p:cSld>
@@ -1023,32 +844,14 @@
           <a:lstStyle/>
           <a:p>
             <a:r>
-              <a:rPr lang="en-US" dirty="0" err="1"/>
-              <a:t>Math.pow</a:t>
-            </a:r>
-            <a:r>
               <a:rPr lang="en-US" dirty="0"/>
-              <a:t>( )</a:t>
-            </a:r>
-          </a:p>
-          <a:p>
-            <a:r>
-              <a:rPr lang="en-US" dirty="0" err="1"/>
-              <a:t>Math.sqrt</a:t>
-            </a:r>
-            <a:r>
-              <a:rPr lang="en-US" dirty="0"/>
-              <a:t>( )</a:t>
-            </a:r>
-          </a:p>
-          <a:p>
-            <a:r>
-              <a:rPr lang="en-US" dirty="0"/>
-              <a:t>Utilities,</a:t>
-            </a:r>
-            <a:r>
-              <a:rPr lang="en-US" baseline="0" dirty="0"/>
-              <a:t> nothing specific to an instance</a:t>
+              <a:t>NOT allowed to write code like this </a:t>
+            </a:r>
+            <a:r>
+              <a:rPr lang="en-US" dirty="0">
+                <a:sym typeface="Wingdings" panose="05000000000000000000" pitchFamily="2" charset="2"/>
+              </a:rPr>
+              <a:t></a:t>
             </a:r>
             <a:endParaRPr lang="en-US" dirty="0"/>
           </a:p>
@@ -1077,7 +880,7 @@
               <a:pPr>
                 <a:defRPr/>
               </a:pPr>
-              <a:t>14</a:t>
+              <a:t>17</a:t>
             </a:fld>
             <a:endParaRPr lang="en-US"/>
           </a:p>
@@ -1086,7 +889,7 @@
     </p:spTree>
     <p:extLst>
       <p:ext uri="{BB962C8B-B14F-4D97-AF65-F5344CB8AC3E}">
-        <p14:creationId xmlns:p14="http://schemas.microsoft.com/office/powerpoint/2010/main" val="478556958"/>
+        <p14:creationId xmlns:p14="http://schemas.microsoft.com/office/powerpoint/2010/main" val="3851447946"/>
       </p:ext>
     </p:extLst>
   </p:cSld>
@@ -1123,7 +926,21 @@
             <p:ph type="sldImg"/>
           </p:nvPr>
         </p:nvSpPr>
-        <p:spPr/>
+        <p:spPr>
+          <a:xfrm>
+            <a:off x="1497013" y="1200150"/>
+            <a:ext cx="4321175" cy="3240088"/>
+          </a:xfrm>
+          <a:prstGeom prst="rect">
+            <a:avLst/>
+          </a:prstGeom>
+          <a:noFill/>
+          <a:ln w="12700">
+            <a:solidFill>
+              <a:prstClr val="black"/>
+            </a:solidFill>
+          </a:ln>
+        </p:spPr>
       </p:sp>
       <p:sp>
         <p:nvSpPr>
@@ -1142,13 +959,46 @@
           <a:p>
             <a:r>
               <a:rPr lang="en-US" dirty="0"/>
-              <a:t>NOT allowed to write code like this </a:t>
-            </a:r>
-            <a:r>
-              <a:rPr lang="en-US" dirty="0">
-                <a:sym typeface="Wingdings" panose="05000000000000000000" pitchFamily="2" charset="2"/>
-              </a:rPr>
-              <a:t></a:t>
+              <a:t>Prompt</a:t>
+            </a:r>
+            <a:r>
+              <a:rPr lang="en-US" baseline="0" dirty="0"/>
+              <a:t> the students, which is static? Which is non-static/instance?</a:t>
+            </a:r>
+          </a:p>
+          <a:p>
+            <a:r>
+              <a:rPr lang="en-US" baseline="0" dirty="0"/>
+              <a:t>Might consider asking the students to role play as point A and point B and point C, ask a random student how far apart A and B are? </a:t>
+            </a:r>
+          </a:p>
+          <a:p>
+            <a:r>
+              <a:rPr lang="en-US" baseline="0" dirty="0"/>
+              <a:t>Then ask A how far away he/she is from B? Then ask C how far away they are from B?</a:t>
+            </a:r>
+          </a:p>
+          <a:p>
+            <a:r>
+              <a:rPr lang="en-US" baseline="0" dirty="0"/>
+              <a:t>It DEPENDS upon who you ask with and instance call, but it does matter who you ask with a static call.</a:t>
+            </a:r>
+          </a:p>
+          <a:p>
+            <a:endParaRPr lang="en-US" baseline="0" dirty="0"/>
+          </a:p>
+          <a:p>
+            <a:r>
+              <a:rPr lang="en-US" baseline="0" dirty="0"/>
+              <a:t>Then live code the class methods with them.  </a:t>
+            </a:r>
+            <a:r>
+              <a:rPr lang="en-US" baseline="0" dirty="0" err="1"/>
+              <a:t>distanceFormulaCalc</a:t>
+            </a:r>
+            <a:r>
+              <a:rPr lang="en-US" baseline="0" dirty="0"/>
+              <a:t> is provided to make this as quick as possible.</a:t>
             </a:r>
             <a:endParaRPr lang="en-US" dirty="0"/>
           </a:p>
@@ -1161,7 +1011,7 @@
             <a:spLocks noGrp="1"/>
           </p:cNvSpPr>
           <p:nvPr>
-            <p:ph type="sldNum" sz="quarter" idx="10"/>
+            <p:ph type="sldNum" idx="10"/>
           </p:nvPr>
         </p:nvSpPr>
         <p:spPr/>
@@ -1169,24 +1019,39 @@
           <a:bodyPr/>
           <a:lstStyle/>
           <a:p>
-            <a:pPr>
-              <a:defRPr/>
-            </a:pPr>
-            <a:fld id="{F3BF035C-C190-4FBE-9474-8535FCFBFED8}" type="slidenum">
-              <a:rPr lang="en-US" smtClean="0"/>
-              <a:pPr>
-                <a:defRPr/>
-              </a:pPr>
+            <a:pPr algn="r"/>
+            <a:fld id="{18E27A71-88A0-42AC-8446-7577892AB166}" type="slidenum">
+              <a:rPr lang="en-US" sz="1400" b="0" strike="noStrike" spc="-1" smtClean="0">
+                <a:solidFill>
+                  <a:srgbClr val="000000"/>
+                </a:solidFill>
+                <a:uFill>
+                  <a:solidFill>
+                    <a:srgbClr val="FFFFFF"/>
+                  </a:solidFill>
+                </a:uFill>
+                <a:latin typeface="Times New Roman"/>
+              </a:rPr>
               <a:t>18</a:t>
             </a:fld>
-            <a:endParaRPr lang="en-US"/>
+            <a:endParaRPr lang="en-US" sz="1400" b="0" strike="noStrike" spc="-1">
+              <a:solidFill>
+                <a:srgbClr val="000000"/>
+              </a:solidFill>
+              <a:uFill>
+                <a:solidFill>
+                  <a:srgbClr val="FFFFFF"/>
+                </a:solidFill>
+              </a:uFill>
+              <a:latin typeface="Times New Roman"/>
+            </a:endParaRPr>
           </a:p>
         </p:txBody>
       </p:sp>
     </p:spTree>
     <p:extLst>
       <p:ext uri="{BB962C8B-B14F-4D97-AF65-F5344CB8AC3E}">
-        <p14:creationId xmlns:p14="http://schemas.microsoft.com/office/powerpoint/2010/main" val="3851447946"/>
+        <p14:creationId xmlns:p14="http://schemas.microsoft.com/office/powerpoint/2010/main" val="3558536368"/>
       </p:ext>
     </p:extLst>
   </p:cSld>
@@ -1254,168 +1119,6 @@
           <a:bodyPr/>
           <a:lstStyle/>
           <a:p>
-            <a:r>
-              <a:rPr lang="en-US" dirty="0"/>
-              <a:t>Prompt</a:t>
-            </a:r>
-            <a:r>
-              <a:rPr lang="en-US" baseline="0" dirty="0"/>
-              <a:t> the students, which is static? Which is non-static/instance?</a:t>
-            </a:r>
-          </a:p>
-          <a:p>
-            <a:r>
-              <a:rPr lang="en-US" baseline="0" dirty="0"/>
-              <a:t>Might consider asking the students to role play as point A and point B and point C, ask a random student how far apart A and B are? </a:t>
-            </a:r>
-          </a:p>
-          <a:p>
-            <a:r>
-              <a:rPr lang="en-US" baseline="0" dirty="0"/>
-              <a:t>Then ask A how far away he/she is from B? Then ask C how far away they are from B?</a:t>
-            </a:r>
-          </a:p>
-          <a:p>
-            <a:r>
-              <a:rPr lang="en-US" baseline="0" dirty="0"/>
-              <a:t>It DEPENDS upon who you ask with and instance call, but it does matter who you ask with a static call.</a:t>
-            </a:r>
-          </a:p>
-          <a:p>
-            <a:endParaRPr lang="en-US" baseline="0" dirty="0"/>
-          </a:p>
-          <a:p>
-            <a:r>
-              <a:rPr lang="en-US" baseline="0" dirty="0"/>
-              <a:t>Then live code the class methods with them.  </a:t>
-            </a:r>
-            <a:r>
-              <a:rPr lang="en-US" baseline="0" dirty="0" err="1"/>
-              <a:t>distanceFormulaCalc</a:t>
-            </a:r>
-            <a:r>
-              <a:rPr lang="en-US" baseline="0" dirty="0"/>
-              <a:t> is provided to make this as quick as possible.</a:t>
-            </a:r>
-            <a:endParaRPr lang="en-US" dirty="0"/>
-          </a:p>
-        </p:txBody>
-      </p:sp>
-      <p:sp>
-        <p:nvSpPr>
-          <p:cNvPr id="4" name="Slide Number Placeholder 3"/>
-          <p:cNvSpPr>
-            <a:spLocks noGrp="1"/>
-          </p:cNvSpPr>
-          <p:nvPr>
-            <p:ph type="sldNum" idx="10"/>
-          </p:nvPr>
-        </p:nvSpPr>
-        <p:spPr/>
-        <p:txBody>
-          <a:bodyPr/>
-          <a:lstStyle/>
-          <a:p>
-            <a:pPr algn="r"/>
-            <a:fld id="{18E27A71-88A0-42AC-8446-7577892AB166}" type="slidenum">
-              <a:rPr lang="en-US" sz="1400" b="0" strike="noStrike" spc="-1" smtClean="0">
-                <a:solidFill>
-                  <a:srgbClr val="000000"/>
-                </a:solidFill>
-                <a:uFill>
-                  <a:solidFill>
-                    <a:srgbClr val="FFFFFF"/>
-                  </a:solidFill>
-                </a:uFill>
-                <a:latin typeface="Times New Roman"/>
-              </a:rPr>
-              <a:t>19</a:t>
-            </a:fld>
-            <a:endParaRPr lang="en-US" sz="1400" b="0" strike="noStrike" spc="-1">
-              <a:solidFill>
-                <a:srgbClr val="000000"/>
-              </a:solidFill>
-              <a:uFill>
-                <a:solidFill>
-                  <a:srgbClr val="FFFFFF"/>
-                </a:solidFill>
-              </a:uFill>
-              <a:latin typeface="Times New Roman"/>
-            </a:endParaRPr>
-          </a:p>
-        </p:txBody>
-      </p:sp>
-    </p:spTree>
-    <p:extLst>
-      <p:ext uri="{BB962C8B-B14F-4D97-AF65-F5344CB8AC3E}">
-        <p14:creationId xmlns:p14="http://schemas.microsoft.com/office/powerpoint/2010/main" val="3558536368"/>
-      </p:ext>
-    </p:extLst>
-  </p:cSld>
-  <p:clrMapOvr>
-    <a:masterClrMapping/>
-  </p:clrMapOvr>
-</p:notes>
-</file>
-
-<file path=ppt/notesSlides/notesSlide15.xml><?xml version="1.0" encoding="utf-8"?>
-<p:notes xmlns:a="http://schemas.openxmlformats.org/drawingml/2006/main" xmlns:r="http://schemas.openxmlformats.org/officeDocument/2006/relationships" xmlns:p="http://schemas.openxmlformats.org/presentationml/2006/main">
-  <p:cSld>
-    <p:spTree>
-      <p:nvGrpSpPr>
-        <p:cNvPr id="1" name=""/>
-        <p:cNvGrpSpPr/>
-        <p:nvPr/>
-      </p:nvGrpSpPr>
-      <p:grpSpPr>
-        <a:xfrm>
-          <a:off x="0" y="0"/>
-          <a:ext cx="0" cy="0"/>
-          <a:chOff x="0" y="0"/>
-          <a:chExt cx="0" cy="0"/>
-        </a:xfrm>
-      </p:grpSpPr>
-      <p:sp>
-        <p:nvSpPr>
-          <p:cNvPr id="2" name="Slide Image Placeholder 1"/>
-          <p:cNvSpPr>
-            <a:spLocks noGrp="1" noRot="1" noChangeAspect="1"/>
-          </p:cNvSpPr>
-          <p:nvPr>
-            <p:ph type="sldImg"/>
-          </p:nvPr>
-        </p:nvSpPr>
-        <p:spPr>
-          <a:xfrm>
-            <a:off x="1497013" y="1200150"/>
-            <a:ext cx="4321175" cy="3240088"/>
-          </a:xfrm>
-          <a:prstGeom prst="rect">
-            <a:avLst/>
-          </a:prstGeom>
-          <a:noFill/>
-          <a:ln w="12700">
-            <a:solidFill>
-              <a:prstClr val="black"/>
-            </a:solidFill>
-          </a:ln>
-        </p:spPr>
-      </p:sp>
-      <p:sp>
-        <p:nvSpPr>
-          <p:cNvPr id="3" name="Notes Placeholder 2"/>
-          <p:cNvSpPr>
-            <a:spLocks noGrp="1"/>
-          </p:cNvSpPr>
-          <p:nvPr>
-            <p:ph type="body" idx="1"/>
-          </p:nvPr>
-        </p:nvSpPr>
-        <p:spPr/>
-        <p:txBody>
-          <a:bodyPr/>
-          <a:lstStyle/>
-          <a:p>
             <a:endParaRPr lang="en-US" dirty="0"/>
           </a:p>
         </p:txBody>
@@ -1448,7 +1151,7 @@
                 </a:uFill>
                 <a:latin typeface="Times New Roman"/>
               </a:rPr>
-              <a:t>21</a:t>
+              <a:t>20</a:t>
             </a:fld>
             <a:endParaRPr lang="en-US" sz="1400" b="0" strike="noStrike" spc="-1">
               <a:solidFill>
@@ -1477,7 +1180,7 @@
 </p:notes>
 </file>
 
-<file path=ppt/notesSlides/notesSlide16.xml><?xml version="1.0" encoding="utf-8"?>
+<file path=ppt/notesSlides/notesSlide15.xml><?xml version="1.0" encoding="utf-8"?>
 <p:notes xmlns:a="http://schemas.openxmlformats.org/drawingml/2006/main" xmlns:r="http://schemas.openxmlformats.org/officeDocument/2006/relationships" xmlns:p="http://schemas.openxmlformats.org/presentationml/2006/main">
   <p:cSld>
     <p:spTree>
@@ -1572,7 +1275,7 @@
                 <a:latin typeface="Calibri"/>
                 <a:ea typeface="+mn-ea"/>
               </a:rPr>
-              <a:t>22</a:t>
+              <a:t>21</a:t>
             </a:fld>
             <a:endParaRPr lang="en-US" sz="1400" b="0" strike="noStrike" spc="-1">
               <a:solidFill>
@@ -1602,96 +1305,6 @@
 </file>
 
 <file path=ppt/notesSlides/notesSlide2.xml><?xml version="1.0" encoding="utf-8"?>
-<p:notes xmlns:a="http://schemas.openxmlformats.org/drawingml/2006/main" xmlns:r="http://schemas.openxmlformats.org/officeDocument/2006/relationships" xmlns:p="http://schemas.openxmlformats.org/presentationml/2006/main">
-  <p:cSld>
-    <p:spTree>
-      <p:nvGrpSpPr>
-        <p:cNvPr id="1" name=""/>
-        <p:cNvGrpSpPr/>
-        <p:nvPr/>
-      </p:nvGrpSpPr>
-      <p:grpSpPr>
-        <a:xfrm>
-          <a:off x="0" y="0"/>
-          <a:ext cx="0" cy="0"/>
-          <a:chOff x="0" y="0"/>
-          <a:chExt cx="0" cy="0"/>
-        </a:xfrm>
-      </p:grpSpPr>
-      <p:sp>
-        <p:nvSpPr>
-          <p:cNvPr id="2" name="Slide Image Placeholder 1"/>
-          <p:cNvSpPr>
-            <a:spLocks noGrp="1" noRot="1" noChangeAspect="1"/>
-          </p:cNvSpPr>
-          <p:nvPr>
-            <p:ph type="sldImg"/>
-          </p:nvPr>
-        </p:nvSpPr>
-        <p:spPr/>
-      </p:sp>
-      <p:sp>
-        <p:nvSpPr>
-          <p:cNvPr id="3" name="Notes Placeholder 2"/>
-          <p:cNvSpPr>
-            <a:spLocks noGrp="1"/>
-          </p:cNvSpPr>
-          <p:nvPr>
-            <p:ph type="body" idx="1"/>
-          </p:nvPr>
-        </p:nvSpPr>
-        <p:spPr/>
-        <p:txBody>
-          <a:bodyPr/>
-          <a:lstStyle/>
-          <a:p>
-            <a:endParaRPr lang="en-US"/>
-          </a:p>
-        </p:txBody>
-      </p:sp>
-      <p:sp>
-        <p:nvSpPr>
-          <p:cNvPr id="4" name="Slide Number Placeholder 3"/>
-          <p:cNvSpPr>
-            <a:spLocks noGrp="1"/>
-          </p:cNvSpPr>
-          <p:nvPr>
-            <p:ph type="sldNum" sz="quarter" idx="10"/>
-          </p:nvPr>
-        </p:nvSpPr>
-        <p:spPr/>
-        <p:txBody>
-          <a:bodyPr/>
-          <a:lstStyle/>
-          <a:p>
-            <a:pPr>
-              <a:defRPr/>
-            </a:pPr>
-            <a:fld id="{F3BF035C-C190-4FBE-9474-8535FCFBFED8}" type="slidenum">
-              <a:rPr lang="en-US" smtClean="0"/>
-              <a:pPr>
-                <a:defRPr/>
-              </a:pPr>
-              <a:t>2</a:t>
-            </a:fld>
-            <a:endParaRPr lang="en-US"/>
-          </a:p>
-        </p:txBody>
-      </p:sp>
-    </p:spTree>
-    <p:extLst>
-      <p:ext uri="{BB962C8B-B14F-4D97-AF65-F5344CB8AC3E}">
-        <p14:creationId xmlns:p14="http://schemas.microsoft.com/office/powerpoint/2010/main" val="2537505001"/>
-      </p:ext>
-    </p:extLst>
-  </p:cSld>
-  <p:clrMapOvr>
-    <a:masterClrMapping/>
-  </p:clrMapOvr>
-</p:notes>
-</file>
-
-<file path=ppt/notesSlides/notesSlide3.xml><?xml version="1.0" encoding="utf-8"?>
 <p:notes xmlns:a="http://schemas.openxmlformats.org/drawingml/2006/main" xmlns:r="http://schemas.openxmlformats.org/officeDocument/2006/relationships" xmlns:p="http://schemas.openxmlformats.org/presentationml/2006/main">
   <p:cSld>
     <p:spTree>
@@ -1803,7 +1416,7 @@
                 <a:latin typeface="Calibri"/>
                 <a:ea typeface="+mn-ea"/>
               </a:rPr>
-              <a:t>3</a:t>
+              <a:t>2</a:t>
             </a:fld>
             <a:endParaRPr lang="en-US" sz="1400" b="0" strike="noStrike" spc="-1">
               <a:solidFill>
@@ -1832,7 +1445,7 @@
 </p:notes>
 </file>
 
-<file path=ppt/notesSlides/notesSlide4.xml><?xml version="1.0" encoding="utf-8"?>
+<file path=ppt/notesSlides/notesSlide3.xml><?xml version="1.0" encoding="utf-8"?>
 <p:notes xmlns:a="http://schemas.openxmlformats.org/drawingml/2006/main" xmlns:r="http://schemas.openxmlformats.org/officeDocument/2006/relationships" xmlns:p="http://schemas.openxmlformats.org/presentationml/2006/main">
   <p:cSld>
     <p:spTree>
@@ -1921,7 +1534,7 @@
             <a:fld id="{CDC4E740-43A9-4CB1-B37F-A3A8D36E5746}" type="slidenum">
               <a:rPr lang="en-US" smtClean="0"/>
               <a:pPr/>
-              <a:t>4</a:t>
+              <a:t>3</a:t>
             </a:fld>
             <a:endParaRPr lang="en-US"/>
           </a:p>
@@ -1940,7 +1553,7 @@
 </p:notes>
 </file>
 
-<file path=ppt/notesSlides/notesSlide5.xml><?xml version="1.0" encoding="utf-8"?>
+<file path=ppt/notesSlides/notesSlide4.xml><?xml version="1.0" encoding="utf-8"?>
 <p:notes xmlns:a="http://schemas.openxmlformats.org/drawingml/2006/main" xmlns:r="http://schemas.openxmlformats.org/officeDocument/2006/relationships" xmlns:p="http://schemas.openxmlformats.org/presentationml/2006/main">
   <p:cSld>
     <p:spTree>
@@ -2192,7 +1805,7 @@
             <a:fld id="{B3B8593A-7963-4D3B-8B2F-E76B6C26D700}" type="slidenum">
               <a:rPr lang="en-US" smtClean="0"/>
               <a:pPr/>
-              <a:t>5</a:t>
+              <a:t>4</a:t>
             </a:fld>
             <a:endParaRPr lang="en-US"/>
           </a:p>
@@ -2211,7 +1824,7 @@
 </p:notes>
 </file>
 
-<file path=ppt/notesSlides/notesSlide6.xml><?xml version="1.0" encoding="utf-8"?>
+<file path=ppt/notesSlides/notesSlide5.xml><?xml version="1.0" encoding="utf-8"?>
 <p:notes xmlns:a="http://schemas.openxmlformats.org/drawingml/2006/main" xmlns:r="http://schemas.openxmlformats.org/officeDocument/2006/relationships" xmlns:p="http://schemas.openxmlformats.org/presentationml/2006/main">
   <p:cSld>
     <p:spTree>
@@ -2330,7 +1943,7 @@
             <a:fld id="{F825BEBA-391D-4869-AB46-6E2ADD51715F}" type="slidenum">
               <a:rPr lang="en-US" smtClean="0"/>
               <a:pPr/>
-              <a:t>6</a:t>
+              <a:t>5</a:t>
             </a:fld>
             <a:endParaRPr lang="en-US"/>
           </a:p>
@@ -2340,6 +1953,130 @@
     <p:extLst>
       <p:ext uri="{BB962C8B-B14F-4D97-AF65-F5344CB8AC3E}">
         <p14:creationId xmlns:p14="http://schemas.microsoft.com/office/powerpoint/2010/main" val="490375880"/>
+      </p:ext>
+    </p:extLst>
+  </p:cSld>
+  <p:clrMapOvr>
+    <a:masterClrMapping/>
+  </p:clrMapOvr>
+</p:notes>
+</file>
+
+<file path=ppt/notesSlides/notesSlide6.xml><?xml version="1.0" encoding="utf-8"?>
+<p:notes xmlns:a="http://schemas.openxmlformats.org/drawingml/2006/main" xmlns:r="http://schemas.openxmlformats.org/officeDocument/2006/relationships" xmlns:p="http://schemas.openxmlformats.org/presentationml/2006/main">
+  <p:cSld>
+    <p:spTree>
+      <p:nvGrpSpPr>
+        <p:cNvPr id="1" name=""/>
+        <p:cNvGrpSpPr/>
+        <p:nvPr/>
+      </p:nvGrpSpPr>
+      <p:grpSpPr>
+        <a:xfrm>
+          <a:off x="0" y="0"/>
+          <a:ext cx="0" cy="0"/>
+          <a:chOff x="0" y="0"/>
+          <a:chExt cx="0" cy="0"/>
+        </a:xfrm>
+      </p:grpSpPr>
+      <p:sp>
+        <p:nvSpPr>
+          <p:cNvPr id="242" name="PlaceHolder 1"/>
+          <p:cNvSpPr>
+            <a:spLocks noGrp="1"/>
+          </p:cNvSpPr>
+          <p:nvPr>
+            <p:ph type="body"/>
+          </p:nvPr>
+        </p:nvSpPr>
+        <p:spPr>
+          <a:xfrm>
+            <a:off x="731880" y="4560840"/>
+            <a:ext cx="5851080" cy="4320720"/>
+          </a:xfrm>
+          <a:prstGeom prst="rect">
+            <a:avLst/>
+          </a:prstGeom>
+        </p:spPr>
+        <p:txBody>
+          <a:bodyPr lIns="96480" tIns="48240" rIns="96480" bIns="48240"/>
+          <a:lstStyle/>
+          <a:p>
+            <a:endParaRPr lang="en-US" sz="2000" b="0" strike="noStrike" spc="-1" dirty="0">
+              <a:solidFill>
+                <a:srgbClr val="000000"/>
+              </a:solidFill>
+              <a:uFill>
+                <a:solidFill>
+                  <a:srgbClr val="FFFFFF"/>
+                </a:solidFill>
+              </a:uFill>
+              <a:latin typeface="Arial"/>
+            </a:endParaRPr>
+          </a:p>
+        </p:txBody>
+      </p:sp>
+      <p:sp>
+        <p:nvSpPr>
+          <p:cNvPr id="243" name="TextShape 2"/>
+          <p:cNvSpPr txBox="1"/>
+          <p:nvPr/>
+        </p:nvSpPr>
+        <p:spPr>
+          <a:xfrm>
+            <a:off x="4143240" y="9118440"/>
+            <a:ext cx="3169800" cy="480600"/>
+          </a:xfrm>
+          <a:prstGeom prst="rect">
+            <a:avLst/>
+          </a:prstGeom>
+          <a:noFill/>
+          <a:ln w="9360">
+            <a:noFill/>
+          </a:ln>
+        </p:spPr>
+        <p:txBody>
+          <a:bodyPr lIns="96480" tIns="48240" rIns="96480" bIns="48240" anchor="b"/>
+          <a:lstStyle/>
+          <a:p>
+            <a:pPr algn="r">
+              <a:lnSpc>
+                <a:spcPct val="100000"/>
+              </a:lnSpc>
+            </a:pPr>
+            <a:fld id="{0FF01DAD-E2BB-4C6A-94B4-8C5DE289AA7D}" type="slidenum">
+              <a:rPr lang="en-US" sz="1200" b="0" strike="noStrike" spc="-1">
+                <a:solidFill>
+                  <a:srgbClr val="000000"/>
+                </a:solidFill>
+                <a:uFill>
+                  <a:solidFill>
+                    <a:srgbClr val="FFFFFF"/>
+                  </a:solidFill>
+                </a:uFill>
+                <a:latin typeface="Calibri"/>
+                <a:ea typeface="+mn-ea"/>
+              </a:rPr>
+              <a:t>6</a:t>
+            </a:fld>
+            <a:endParaRPr lang="en-US" sz="1400" b="0" strike="noStrike" spc="-1">
+              <a:solidFill>
+                <a:srgbClr val="000000"/>
+              </a:solidFill>
+              <a:uFill>
+                <a:solidFill>
+                  <a:srgbClr val="FFFFFF"/>
+                </a:solidFill>
+              </a:uFill>
+              <a:latin typeface="Times New Roman"/>
+            </a:endParaRPr>
+          </a:p>
+        </p:txBody>
+      </p:sp>
+    </p:spTree>
+    <p:extLst>
+      <p:ext uri="{BB962C8B-B14F-4D97-AF65-F5344CB8AC3E}">
+        <p14:creationId xmlns:p14="http://schemas.microsoft.com/office/powerpoint/2010/main" val="3940538462"/>
       </p:ext>
     </p:extLst>
   </p:cSld>
@@ -2389,17 +2126,20 @@
           <a:bodyPr lIns="96480" tIns="48240" rIns="96480" bIns="48240"/>
           <a:lstStyle/>
           <a:p>
-            <a:endParaRPr lang="en-US" sz="2000" b="0" strike="noStrike" spc="-1" dirty="0">
-              <a:solidFill>
-                <a:srgbClr val="000000"/>
-              </a:solidFill>
-              <a:uFill>
-                <a:solidFill>
-                  <a:srgbClr val="FFFFFF"/>
-                </a:solidFill>
-              </a:uFill>
-              <a:latin typeface="Arial"/>
-            </a:endParaRPr>
+            <a:r>
+              <a:rPr lang="en-US" sz="2000" b="0" strike="noStrike" spc="-1" dirty="0">
+                <a:solidFill>
+                  <a:srgbClr val="000000"/>
+                </a:solidFill>
+                <a:uFill>
+                  <a:solidFill>
+                    <a:srgbClr val="FFFFFF"/>
+                  </a:solidFill>
+                </a:uFill>
+                <a:latin typeface="Arial"/>
+              </a:rPr>
+              <a:t>== operator in String is a weird animal. Depending on which JVM you are using, it may cache the string literal or not. If the JVM caches the String literal, then == returns true otherwise it returns false. It is always the best to use the equals() method on String.</a:t>
+            </a:r>
           </a:p>
         </p:txBody>
       </p:sp>
@@ -2463,7 +2203,7 @@
     </p:spTree>
     <p:extLst>
       <p:ext uri="{BB962C8B-B14F-4D97-AF65-F5344CB8AC3E}">
-        <p14:creationId xmlns:p14="http://schemas.microsoft.com/office/powerpoint/2010/main" val="3940538462"/>
+        <p14:creationId xmlns:p14="http://schemas.microsoft.com/office/powerpoint/2010/main" val="1832984681"/>
       </p:ext>
     </p:extLst>
   </p:cSld>
@@ -2474,133 +2214,6 @@
 </file>
 
 <file path=ppt/notesSlides/notesSlide8.xml><?xml version="1.0" encoding="utf-8"?>
-<p:notes xmlns:a="http://schemas.openxmlformats.org/drawingml/2006/main" xmlns:r="http://schemas.openxmlformats.org/officeDocument/2006/relationships" xmlns:p="http://schemas.openxmlformats.org/presentationml/2006/main">
-  <p:cSld>
-    <p:spTree>
-      <p:nvGrpSpPr>
-        <p:cNvPr id="1" name=""/>
-        <p:cNvGrpSpPr/>
-        <p:nvPr/>
-      </p:nvGrpSpPr>
-      <p:grpSpPr>
-        <a:xfrm>
-          <a:off x="0" y="0"/>
-          <a:ext cx="0" cy="0"/>
-          <a:chOff x="0" y="0"/>
-          <a:chExt cx="0" cy="0"/>
-        </a:xfrm>
-      </p:grpSpPr>
-      <p:sp>
-        <p:nvSpPr>
-          <p:cNvPr id="242" name="PlaceHolder 1"/>
-          <p:cNvSpPr>
-            <a:spLocks noGrp="1"/>
-          </p:cNvSpPr>
-          <p:nvPr>
-            <p:ph type="body"/>
-          </p:nvPr>
-        </p:nvSpPr>
-        <p:spPr>
-          <a:xfrm>
-            <a:off x="731880" y="4560840"/>
-            <a:ext cx="5851080" cy="4320720"/>
-          </a:xfrm>
-          <a:prstGeom prst="rect">
-            <a:avLst/>
-          </a:prstGeom>
-        </p:spPr>
-        <p:txBody>
-          <a:bodyPr lIns="96480" tIns="48240" rIns="96480" bIns="48240"/>
-          <a:lstStyle/>
-          <a:p>
-            <a:r>
-              <a:rPr lang="en-US" sz="2000" b="0" strike="noStrike" spc="-1" dirty="0">
-                <a:solidFill>
-                  <a:srgbClr val="000000"/>
-                </a:solidFill>
-                <a:uFill>
-                  <a:solidFill>
-                    <a:srgbClr val="FFFFFF"/>
-                  </a:solidFill>
-                </a:uFill>
-                <a:latin typeface="Arial"/>
-              </a:rPr>
-              <a:t>== operator in String is a weird animal. Depending on which JVM you are using, it may cache the string literal or not. If the JVM caches the String literal, then == returns true otherwise it returns false. It is always the best to use the equals() method on String.</a:t>
-            </a:r>
-          </a:p>
-        </p:txBody>
-      </p:sp>
-      <p:sp>
-        <p:nvSpPr>
-          <p:cNvPr id="243" name="TextShape 2"/>
-          <p:cNvSpPr txBox="1"/>
-          <p:nvPr/>
-        </p:nvSpPr>
-        <p:spPr>
-          <a:xfrm>
-            <a:off x="4143240" y="9118440"/>
-            <a:ext cx="3169800" cy="480600"/>
-          </a:xfrm>
-          <a:prstGeom prst="rect">
-            <a:avLst/>
-          </a:prstGeom>
-          <a:noFill/>
-          <a:ln w="9360">
-            <a:noFill/>
-          </a:ln>
-        </p:spPr>
-        <p:txBody>
-          <a:bodyPr lIns="96480" tIns="48240" rIns="96480" bIns="48240" anchor="b"/>
-          <a:lstStyle/>
-          <a:p>
-            <a:pPr algn="r">
-              <a:lnSpc>
-                <a:spcPct val="100000"/>
-              </a:lnSpc>
-            </a:pPr>
-            <a:fld id="{0FF01DAD-E2BB-4C6A-94B4-8C5DE289AA7D}" type="slidenum">
-              <a:rPr lang="en-US" sz="1200" b="0" strike="noStrike" spc="-1">
-                <a:solidFill>
-                  <a:srgbClr val="000000"/>
-                </a:solidFill>
-                <a:uFill>
-                  <a:solidFill>
-                    <a:srgbClr val="FFFFFF"/>
-                  </a:solidFill>
-                </a:uFill>
-                <a:latin typeface="Calibri"/>
-                <a:ea typeface="+mn-ea"/>
-              </a:rPr>
-              <a:t>8</a:t>
-            </a:fld>
-            <a:endParaRPr lang="en-US" sz="1400" b="0" strike="noStrike" spc="-1">
-              <a:solidFill>
-                <a:srgbClr val="000000"/>
-              </a:solidFill>
-              <a:uFill>
-                <a:solidFill>
-                  <a:srgbClr val="FFFFFF"/>
-                </a:solidFill>
-              </a:uFill>
-              <a:latin typeface="Times New Roman"/>
-            </a:endParaRPr>
-          </a:p>
-        </p:txBody>
-      </p:sp>
-    </p:spTree>
-    <p:extLst>
-      <p:ext uri="{BB962C8B-B14F-4D97-AF65-F5344CB8AC3E}">
-        <p14:creationId xmlns:p14="http://schemas.microsoft.com/office/powerpoint/2010/main" val="1832984681"/>
-      </p:ext>
-    </p:extLst>
-  </p:cSld>
-  <p:clrMapOvr>
-    <a:masterClrMapping/>
-  </p:clrMapOvr>
-</p:notes>
-</file>
-
-<file path=ppt/notesSlides/notesSlide9.xml><?xml version="1.0" encoding="utf-8"?>
 <p:notes xmlns:a="http://schemas.openxmlformats.org/drawingml/2006/main" xmlns:r="http://schemas.openxmlformats.org/officeDocument/2006/relationships" xmlns:p="http://schemas.openxmlformats.org/presentationml/2006/main">
   <p:cSld>
     <p:spTree>
@@ -2801,7 +2414,7 @@
               <a:pPr>
                 <a:defRPr/>
               </a:pPr>
-              <a:t>9</a:t>
+              <a:t>8</a:t>
             </a:fld>
             <a:endParaRPr lang="en-US"/>
           </a:p>
@@ -2811,6 +2424,241 @@
     <p:extLst>
       <p:ext uri="{BB962C8B-B14F-4D97-AF65-F5344CB8AC3E}">
         <p14:creationId xmlns:p14="http://schemas.microsoft.com/office/powerpoint/2010/main" val="2835313470"/>
+      </p:ext>
+    </p:extLst>
+  </p:cSld>
+  <p:clrMapOvr>
+    <a:masterClrMapping/>
+  </p:clrMapOvr>
+</p:notes>
+</file>
+
+<file path=ppt/notesSlides/notesSlide9.xml><?xml version="1.0" encoding="utf-8"?>
+<p:notes xmlns:a="http://schemas.openxmlformats.org/drawingml/2006/main" xmlns:r="http://schemas.openxmlformats.org/officeDocument/2006/relationships" xmlns:p="http://schemas.openxmlformats.org/presentationml/2006/main">
+  <p:cSld>
+    <p:spTree>
+      <p:nvGrpSpPr>
+        <p:cNvPr id="1" name=""/>
+        <p:cNvGrpSpPr/>
+        <p:nvPr/>
+      </p:nvGrpSpPr>
+      <p:grpSpPr>
+        <a:xfrm>
+          <a:off x="0" y="0"/>
+          <a:ext cx="0" cy="0"/>
+          <a:chOff x="0" y="0"/>
+          <a:chExt cx="0" cy="0"/>
+        </a:xfrm>
+      </p:grpSpPr>
+      <p:sp>
+        <p:nvSpPr>
+          <p:cNvPr id="30722" name="Slide Image Placeholder 1"/>
+          <p:cNvSpPr>
+            <a:spLocks noGrp="1" noRot="1" noChangeAspect="1" noTextEdit="1"/>
+          </p:cNvSpPr>
+          <p:nvPr>
+            <p:ph type="sldImg"/>
+          </p:nvPr>
+        </p:nvSpPr>
+        <p:spPr bwMode="auto">
+          <a:noFill/>
+          <a:ln>
+            <a:solidFill>
+              <a:srgbClr val="000000"/>
+            </a:solidFill>
+            <a:miter lim="800000"/>
+            <a:headEnd/>
+            <a:tailEnd/>
+          </a:ln>
+        </p:spPr>
+      </p:sp>
+      <p:sp>
+        <p:nvSpPr>
+          <p:cNvPr id="30723" name="Notes Placeholder 2"/>
+          <p:cNvSpPr>
+            <a:spLocks noGrp="1"/>
+          </p:cNvSpPr>
+          <p:nvPr>
+            <p:ph type="body" idx="1"/>
+          </p:nvPr>
+        </p:nvSpPr>
+        <p:spPr>
+          <a:noFill/>
+          <a:ln/>
+        </p:spPr>
+        <p:txBody>
+          <a:bodyPr/>
+          <a:lstStyle/>
+          <a:p>
+            <a:r>
+              <a:rPr lang="en-US" sz="1200" b="0" strike="noStrike" spc="-1" dirty="0">
+                <a:solidFill>
+                  <a:srgbClr val="000000"/>
+                </a:solidFill>
+                <a:uFill>
+                  <a:solidFill>
+                    <a:srgbClr val="FFFFFF"/>
+                  </a:solidFill>
+                </a:uFill>
+                <a:latin typeface="Arial"/>
+              </a:rPr>
+              <a:t>Start at second hour 0:30 minutes to have </a:t>
+            </a:r>
+            <a:r>
+              <a:rPr lang="en-US" sz="1200" b="0" strike="noStrike" spc="-1">
+                <a:solidFill>
+                  <a:srgbClr val="000000"/>
+                </a:solidFill>
+                <a:uFill>
+                  <a:solidFill>
+                    <a:srgbClr val="FFFFFF"/>
+                  </a:solidFill>
+                </a:uFill>
+                <a:latin typeface="Arial"/>
+              </a:rPr>
+              <a:t>the 20 </a:t>
+            </a:r>
+            <a:r>
+              <a:rPr lang="en-US" sz="1200" b="0" strike="noStrike" spc="-1" dirty="0">
+                <a:solidFill>
+                  <a:srgbClr val="000000"/>
+                </a:solidFill>
+                <a:uFill>
+                  <a:solidFill>
+                    <a:srgbClr val="FFFFFF"/>
+                  </a:solidFill>
+                </a:uFill>
+                <a:latin typeface="Arial"/>
+              </a:rPr>
+              <a:t>minutes needed to go over this</a:t>
+            </a:r>
+          </a:p>
+          <a:p>
+            <a:endParaRPr lang="en-US" sz="1200" b="0" strike="noStrike" spc="-1" dirty="0">
+              <a:solidFill>
+                <a:srgbClr val="000000"/>
+              </a:solidFill>
+              <a:uFill>
+                <a:solidFill>
+                  <a:srgbClr val="FFFFFF"/>
+                </a:solidFill>
+              </a:uFill>
+              <a:latin typeface="Arial"/>
+            </a:endParaRPr>
+          </a:p>
+          <a:p>
+            <a:r>
+              <a:rPr lang="en-US" sz="1200" b="0" strike="noStrike" spc="-1" dirty="0">
+                <a:solidFill>
+                  <a:srgbClr val="000000"/>
+                </a:solidFill>
+                <a:uFill>
+                  <a:solidFill>
+                    <a:srgbClr val="FFFFFF"/>
+                  </a:solidFill>
+                </a:uFill>
+                <a:latin typeface="Arial"/>
+              </a:rPr>
+              <a:t>Look at schedule, EXAM soon! Non-coding/Written part first, programming part second.</a:t>
+            </a:r>
+          </a:p>
+          <a:p>
+            <a:r>
+              <a:rPr lang="en-US" sz="1200" b="0" strike="noStrike" spc="-1" dirty="0">
+                <a:solidFill>
+                  <a:srgbClr val="000000"/>
+                </a:solidFill>
+                <a:uFill>
+                  <a:solidFill>
+                    <a:srgbClr val="FFFFFF"/>
+                  </a:solidFill>
+                </a:uFill>
+                <a:latin typeface="Arial"/>
+              </a:rPr>
+              <a:t>Review Exams</a:t>
+            </a:r>
+          </a:p>
+          <a:p>
+            <a:r>
+              <a:rPr lang="en-US" sz="1200" b="0" strike="noStrike" spc="-1" dirty="0">
+                <a:solidFill>
+                  <a:srgbClr val="000000"/>
+                </a:solidFill>
+                <a:uFill>
+                  <a:solidFill>
+                    <a:srgbClr val="FFFFFF"/>
+                  </a:solidFill>
+                </a:uFill>
+                <a:latin typeface="Arial"/>
+              </a:rPr>
+              <a:t>Grades</a:t>
+            </a:r>
+            <a:r>
+              <a:rPr lang="en-US" sz="1200" b="0" strike="noStrike" spc="-1" baseline="0" dirty="0">
+                <a:solidFill>
+                  <a:srgbClr val="000000"/>
+                </a:solidFill>
+                <a:uFill>
+                  <a:solidFill>
+                    <a:srgbClr val="FFFFFF"/>
+                  </a:solidFill>
+                </a:uFill>
+                <a:latin typeface="Arial"/>
+              </a:rPr>
+              <a:t> – see me at break or after class if you feel your grade is wrong.</a:t>
+            </a:r>
+            <a:endParaRPr lang="en-US" sz="1200" b="0" strike="noStrike" spc="-1" dirty="0">
+              <a:solidFill>
+                <a:srgbClr val="000000"/>
+              </a:solidFill>
+              <a:uFill>
+                <a:solidFill>
+                  <a:srgbClr val="FFFFFF"/>
+                </a:solidFill>
+              </a:uFill>
+              <a:latin typeface="Arial"/>
+            </a:endParaRPr>
+          </a:p>
+          <a:p>
+            <a:pPr eaLnBrk="1" hangingPunct="1">
+              <a:spcBef>
+                <a:spcPct val="0"/>
+              </a:spcBef>
+            </a:pPr>
+            <a:endParaRPr lang="en-US" dirty="0"/>
+          </a:p>
+        </p:txBody>
+      </p:sp>
+      <p:sp>
+        <p:nvSpPr>
+          <p:cNvPr id="30724" name="Slide Number Placeholder 3"/>
+          <p:cNvSpPr>
+            <a:spLocks noGrp="1"/>
+          </p:cNvSpPr>
+          <p:nvPr>
+            <p:ph type="sldNum" sz="quarter" idx="5"/>
+          </p:nvPr>
+        </p:nvSpPr>
+        <p:spPr>
+          <a:noFill/>
+        </p:spPr>
+        <p:txBody>
+          <a:bodyPr/>
+          <a:lstStyle/>
+          <a:p>
+            <a:fld id="{CDC4E740-43A9-4CB1-B37F-A3A8D36E5746}" type="slidenum">
+              <a:rPr lang="en-US" smtClean="0"/>
+              <a:pPr/>
+              <a:t>9</a:t>
+            </a:fld>
+            <a:endParaRPr lang="en-US"/>
+          </a:p>
+        </p:txBody>
+      </p:sp>
+    </p:spTree>
+    <p:extLst>
+      <p:ext uri="{BB962C8B-B14F-4D97-AF65-F5344CB8AC3E}">
+        <p14:creationId xmlns:p14="http://schemas.microsoft.com/office/powerpoint/2010/main" val="256276142"/>
       </p:ext>
     </p:extLst>
   </p:cSld>
@@ -3558,7 +3406,7 @@
               <a:pPr>
                 <a:defRPr/>
               </a:pPr>
-              <a:t>Tuesday, March 18, 2025</a:t>
+              <a:t>Wednesday, September 9, 2026</a:t>
             </a:fld>
             <a:endParaRPr lang="en-US" dirty="0"/>
           </a:p>
@@ -3741,7 +3589,7 @@
               <a:pPr>
                 <a:defRPr/>
               </a:pPr>
-              <a:t>Tuesday, March 18, 2025</a:t>
+              <a:t>Wednesday, September 9, 2026</a:t>
             </a:fld>
             <a:endParaRPr lang="en-US" dirty="0"/>
           </a:p>
@@ -5683,12 +5531,12 @@
       </p:grpSpPr>
       <p:sp>
         <p:nvSpPr>
-          <p:cNvPr id="2" name="Rectangle 1"/>
+          <p:cNvPr id="2" name="Title 1"/>
           <p:cNvSpPr>
             <a:spLocks noGrp="1"/>
           </p:cNvSpPr>
           <p:nvPr>
-            <p:ph type="ctrTitle"/>
+            <p:ph type="title"/>
           </p:nvPr>
         </p:nvSpPr>
         <p:spPr/>
@@ -5696,325 +5544,57 @@
           <a:bodyPr/>
           <a:lstStyle/>
           <a:p>
-            <a:pPr eaLnBrk="1" fontAlgn="auto" hangingPunct="1">
-              <a:spcAft>
-                <a:spcPts val="0"/>
-              </a:spcAft>
-              <a:defRPr/>
-            </a:pPr>
             <a:r>
               <a:rPr lang="en-US"/>
-              <a:t>CSSE 220</a:t>
+              <a:t>Plan for today</a:t>
             </a:r>
           </a:p>
         </p:txBody>
       </p:sp>
       <p:sp>
         <p:nvSpPr>
-          <p:cNvPr id="9219" name="Rectangle 2"/>
+          <p:cNvPr id="3" name="Content Placeholder 2"/>
           <p:cNvSpPr>
             <a:spLocks noGrp="1"/>
           </p:cNvSpPr>
           <p:nvPr>
-            <p:ph type="subTitle" idx="1"/>
+            <p:ph idx="1"/>
           </p:nvPr>
         </p:nvSpPr>
-        <p:spPr>
-          <a:xfrm>
-            <a:off x="1371600" y="3386031"/>
-            <a:ext cx="6400800" cy="1752600"/>
-          </a:xfrm>
-        </p:spPr>
+        <p:spPr/>
         <p:txBody>
           <a:bodyPr/>
           <a:lstStyle/>
           <a:p>
             <a:r>
-              <a:rPr lang="en-US" sz="2500" i="1" dirty="0" err="1"/>
-              <a:t>MapsHW</a:t>
-            </a:r>
-            <a:r>
-              <a:rPr lang="en-US" sz="2500" dirty="0"/>
-              <a:t> &amp; </a:t>
-            </a:r>
-            <a:r>
-              <a:rPr lang="en-US" i="1" spc="-1" dirty="0" err="1">
-                <a:solidFill>
-                  <a:srgbClr val="000000"/>
-                </a:solidFill>
-                <a:uFill>
-                  <a:solidFill>
-                    <a:srgbClr val="FFFFFF"/>
-                  </a:solidFill>
-                </a:uFill>
-                <a:latin typeface="Calibri"/>
-              </a:rPr>
-              <a:t>StudentGradebook</a:t>
-            </a:r>
-            <a:r>
-              <a:rPr lang="en-US" sz="2500" dirty="0"/>
-              <a:t> </a:t>
-            </a:r>
-          </a:p>
-          <a:p>
-            <a:pPr marR="0" eaLnBrk="1" hangingPunct="1">
-              <a:lnSpc>
-                <a:spcPct val="90000"/>
-              </a:lnSpc>
-            </a:pPr>
-            <a:endParaRPr lang="en-US" sz="2500" dirty="0"/>
+              <a:rPr lang="en-US"/>
+              <a:t>Talk about object references and box and pointer diagrams</a:t>
+            </a:r>
+          </a:p>
+          <a:p>
+            <a:r>
+              <a:rPr lang="en-US"/>
+              <a:t>Talk about static methods</a:t>
+            </a:r>
+          </a:p>
+          <a:p>
+            <a:r>
+              <a:rPr lang="en-US"/>
+              <a:t>Continue working on writing your own classes</a:t>
+            </a:r>
+          </a:p>
+          <a:p>
+            <a:r>
+              <a:rPr lang="en-US"/>
+              <a:t>Get started on your new assignment</a:t>
+            </a:r>
           </a:p>
         </p:txBody>
       </p:sp>
-      <p:sp>
-        <p:nvSpPr>
-          <p:cNvPr id="3" name="Rectangle 2">
-            <a:extLst>
-              <a:ext uri="{FF2B5EF4-FFF2-40B4-BE49-F238E27FC236}">
-                <a16:creationId xmlns:a16="http://schemas.microsoft.com/office/drawing/2014/main" id="{51854E33-332D-E678-3875-139AAF40B4A7}"/>
-              </a:ext>
-            </a:extLst>
-          </p:cNvPr>
-          <p:cNvSpPr/>
-          <p:nvPr/>
-        </p:nvSpPr>
-        <p:spPr>
-          <a:xfrm>
-            <a:off x="304800" y="4168139"/>
-            <a:ext cx="8534400" cy="2439674"/>
-          </a:xfrm>
-          <a:prstGeom prst="rect">
-            <a:avLst/>
-          </a:prstGeom>
-        </p:spPr>
-        <p:style>
-          <a:lnRef idx="2">
-            <a:schemeClr val="accent3">
-              <a:shade val="50000"/>
-            </a:schemeClr>
-          </a:lnRef>
-          <a:fillRef idx="1">
-            <a:schemeClr val="accent3"/>
-          </a:fillRef>
-          <a:effectRef idx="0">
-            <a:schemeClr val="accent3"/>
-          </a:effectRef>
-          <a:fontRef idx="minor">
-            <a:schemeClr val="lt1"/>
-          </a:fontRef>
-        </p:style>
-        <p:txBody>
-          <a:bodyPr rtlCol="0" anchor="ctr"/>
-          <a:lstStyle/>
-          <a:p>
-            <a:r>
-              <a:rPr lang="en-US" sz="2400" dirty="0">
-                <a:solidFill>
-                  <a:srgbClr val="FFFFFF"/>
-                </a:solidFill>
-              </a:rPr>
-              <a:t>The </a:t>
-            </a:r>
-            <a:r>
-              <a:rPr lang="en-US" sz="2400" i="1" dirty="0">
-                <a:solidFill>
-                  <a:srgbClr val="FFFFFF"/>
-                </a:solidFill>
-              </a:rPr>
-              <a:t>git</a:t>
-            </a:r>
-            <a:r>
-              <a:rPr lang="en-US" sz="2400" dirty="0">
-                <a:solidFill>
-                  <a:srgbClr val="FFFFFF"/>
-                </a:solidFill>
-              </a:rPr>
-              <a:t> projects for today are:</a:t>
-            </a:r>
-          </a:p>
-          <a:p>
-            <a:pPr marL="342900" indent="-342900">
-              <a:buFont typeface="Arial" panose="020B0604020202020204" pitchFamily="34" charset="0"/>
-              <a:buChar char="•"/>
-            </a:pPr>
-            <a:r>
-              <a:rPr lang="en-US" sz="2400" i="1" dirty="0" err="1"/>
-              <a:t>PracticeSuperSimpleObjects</a:t>
-            </a:r>
-            <a:endParaRPr lang="en-US" sz="2400" i="1" dirty="0"/>
-          </a:p>
-          <a:p>
-            <a:pPr marL="342900" indent="-342900">
-              <a:buFont typeface="Arial" panose="020B0604020202020204" pitchFamily="34" charset="0"/>
-              <a:buChar char="•"/>
-            </a:pPr>
-            <a:r>
-              <a:rPr lang="en-US" sz="2400" i="1" dirty="0" err="1"/>
-              <a:t>PracticeSuperSimpleObjectsSolution</a:t>
-            </a:r>
-            <a:endParaRPr lang="en-US" sz="2400" i="1" dirty="0"/>
-          </a:p>
-          <a:p>
-            <a:pPr marL="342900" indent="-342900">
-              <a:buFont typeface="Arial" panose="020B0604020202020204" pitchFamily="34" charset="0"/>
-              <a:buChar char="•"/>
-            </a:pPr>
-            <a:r>
-              <a:rPr lang="en-US" sz="2400" i="1" dirty="0" err="1"/>
-              <a:t>PracticeSuperSimpleObjectsBoxAndPointers</a:t>
-            </a:r>
-            <a:endParaRPr lang="en-US" sz="2400" i="1" dirty="0"/>
-          </a:p>
-          <a:p>
-            <a:r>
-              <a:rPr lang="en-US" sz="2400" dirty="0">
-                <a:solidFill>
-                  <a:srgbClr val="FFFFFF"/>
-                </a:solidFill>
-              </a:rPr>
-              <a:t>The </a:t>
-            </a:r>
-            <a:r>
-              <a:rPr lang="en-US" sz="2400" i="1" dirty="0">
-                <a:solidFill>
-                  <a:srgbClr val="FFFFFF"/>
-                </a:solidFill>
-              </a:rPr>
-              <a:t>Quiz</a:t>
-            </a:r>
-            <a:r>
-              <a:rPr lang="en-US" sz="2400" dirty="0">
-                <a:solidFill>
-                  <a:srgbClr val="FFFFFF"/>
-                </a:solidFill>
-              </a:rPr>
-              <a:t> for today is</a:t>
-            </a:r>
-            <a:endParaRPr lang="en-US" sz="2400" i="1" dirty="0">
-              <a:solidFill>
-                <a:srgbClr val="FFFFFF"/>
-              </a:solidFill>
-            </a:endParaRPr>
-          </a:p>
-          <a:p>
-            <a:pPr marL="298450" lvl="0"/>
-            <a:r>
-              <a:rPr lang="en-US" sz="2400" i="1" dirty="0" err="1">
-                <a:solidFill>
-                  <a:srgbClr val="FFFFFF"/>
-                </a:solidFill>
-              </a:rPr>
-              <a:t>SimpleObjectsQuiz</a:t>
-            </a:r>
-            <a:endParaRPr lang="en-US" sz="2400" i="1" dirty="0"/>
-          </a:p>
-        </p:txBody>
-      </p:sp>
-      <p:sp>
-        <p:nvSpPr>
-          <p:cNvPr id="4" name="TextBox 3">
-            <a:extLst>
-              <a:ext uri="{FF2B5EF4-FFF2-40B4-BE49-F238E27FC236}">
-                <a16:creationId xmlns:a16="http://schemas.microsoft.com/office/drawing/2014/main" id="{88299B38-4E01-0C8D-B27E-24B46DF57E87}"/>
-              </a:ext>
-            </a:extLst>
-          </p:cNvPr>
-          <p:cNvSpPr txBox="1"/>
-          <p:nvPr/>
-        </p:nvSpPr>
-        <p:spPr>
-          <a:xfrm>
-            <a:off x="4038600" y="672930"/>
-            <a:ext cx="4619625" cy="1046440"/>
-          </a:xfrm>
-          <a:prstGeom prst="rect">
-            <a:avLst/>
-          </a:prstGeom>
-          <a:noFill/>
-          <a:ln w="12700" cap="flat">
-            <a:noFill/>
-            <a:miter lim="400000"/>
-          </a:ln>
-          <a:effectLst/>
-        </p:spPr>
-        <p:style>
-          <a:lnRef idx="0">
-            <a:scrgbClr r="0" g="0" b="0"/>
-          </a:lnRef>
-          <a:fillRef idx="0">
-            <a:scrgbClr r="0" g="0" b="0"/>
-          </a:fillRef>
-          <a:effectRef idx="0">
-            <a:scrgbClr r="0" g="0" b="0"/>
-          </a:effectRef>
-          <a:fontRef idx="none"/>
-        </p:style>
-        <p:txBody>
-          <a:bodyPr wrap="square">
-            <a:spAutoFit/>
-          </a:bodyPr>
-          <a:lstStyle/>
-          <a:p>
-            <a:r>
-              <a:rPr lang="en-US" dirty="0">
-                <a:highlight>
-                  <a:srgbClr val="FFFF00"/>
-                </a:highlight>
-              </a:rPr>
-              <a:t>Today’s Attendance password</a:t>
-            </a:r>
-          </a:p>
-          <a:p>
-            <a:r>
-              <a:rPr lang="en-US" sz="4400" dirty="0" err="1">
-                <a:highlight>
-                  <a:srgbClr val="FFFF00"/>
-                </a:highlight>
-              </a:rPr>
-              <a:t>simpleClasses</a:t>
-            </a:r>
-            <a:endParaRPr lang="en-US" sz="4400" dirty="0">
-              <a:highlight>
-                <a:srgbClr val="FFFF00"/>
-              </a:highlight>
-            </a:endParaRPr>
-          </a:p>
-        </p:txBody>
-      </p:sp>
-      <p:pic>
-        <p:nvPicPr>
-          <p:cNvPr id="5" name="Picture 4">
-            <a:extLst>
-              <a:ext uri="{FF2B5EF4-FFF2-40B4-BE49-F238E27FC236}">
-                <a16:creationId xmlns:a16="http://schemas.microsoft.com/office/drawing/2014/main" id="{3393AC9C-4578-DB8C-1CDE-334C1CF418EB}"/>
-              </a:ext>
-            </a:extLst>
-          </p:cNvPr>
-          <p:cNvPicPr>
-            <a:picLocks noChangeAspect="1"/>
-          </p:cNvPicPr>
-          <p:nvPr/>
-        </p:nvPicPr>
-        <p:blipFill>
-          <a:blip r:embed="rId3"/>
-          <a:stretch>
-            <a:fillRect/>
-          </a:stretch>
-        </p:blipFill>
-        <p:spPr>
-          <a:xfrm>
-            <a:off x="485775" y="115598"/>
-            <a:ext cx="2683719" cy="2324076"/>
-          </a:xfrm>
-          <a:prstGeom prst="rect">
-            <a:avLst/>
-          </a:prstGeom>
-        </p:spPr>
-      </p:pic>
     </p:spTree>
     <p:extLst>
       <p:ext uri="{BB962C8B-B14F-4D97-AF65-F5344CB8AC3E}">
-        <p14:creationId xmlns:p14="http://schemas.microsoft.com/office/powerpoint/2010/main" val="804299971"/>
+        <p14:creationId xmlns:p14="http://schemas.microsoft.com/office/powerpoint/2010/main" val="2719131964"/>
       </p:ext>
     </p:extLst>
   </p:cSld>
@@ -6025,200 +5605,6 @@
 </file>
 
 <file path=ppt/slides/slide10.xml><?xml version="1.0" encoding="utf-8"?>
-<p:sld xmlns:a="http://schemas.openxmlformats.org/drawingml/2006/main" xmlns:r="http://schemas.openxmlformats.org/officeDocument/2006/relationships" xmlns:p="http://schemas.openxmlformats.org/presentationml/2006/main">
-  <p:cSld>
-    <p:spTree>
-      <p:nvGrpSpPr>
-        <p:cNvPr id="1" name=""/>
-        <p:cNvGrpSpPr/>
-        <p:nvPr/>
-      </p:nvGrpSpPr>
-      <p:grpSpPr>
-        <a:xfrm>
-          <a:off x="0" y="0"/>
-          <a:ext cx="0" cy="0"/>
-          <a:chOff x="0" y="0"/>
-          <a:chExt cx="0" cy="0"/>
-        </a:xfrm>
-      </p:grpSpPr>
-      <p:sp>
-        <p:nvSpPr>
-          <p:cNvPr id="2" name="Rectangle 1"/>
-          <p:cNvSpPr>
-            <a:spLocks noGrp="1"/>
-          </p:cNvSpPr>
-          <p:nvPr>
-            <p:ph type="ctrTitle"/>
-          </p:nvPr>
-        </p:nvSpPr>
-        <p:spPr/>
-        <p:txBody>
-          <a:bodyPr/>
-          <a:lstStyle/>
-          <a:p>
-            <a:pPr eaLnBrk="1" fontAlgn="auto" hangingPunct="1">
-              <a:spcAft>
-                <a:spcPts val="0"/>
-              </a:spcAft>
-              <a:defRPr/>
-            </a:pPr>
-            <a:r>
-              <a:rPr lang="en-US" dirty="0"/>
-              <a:t>CSSE 220</a:t>
-            </a:r>
-          </a:p>
-        </p:txBody>
-      </p:sp>
-      <p:sp>
-        <p:nvSpPr>
-          <p:cNvPr id="9219" name="Rectangle 2"/>
-          <p:cNvSpPr>
-            <a:spLocks noGrp="1"/>
-          </p:cNvSpPr>
-          <p:nvPr>
-            <p:ph type="subTitle" idx="1"/>
-          </p:nvPr>
-        </p:nvSpPr>
-        <p:spPr/>
-        <p:txBody>
-          <a:bodyPr/>
-          <a:lstStyle/>
-          <a:p>
-            <a:pPr marR="0" eaLnBrk="1" hangingPunct="1">
-              <a:lnSpc>
-                <a:spcPct val="90000"/>
-              </a:lnSpc>
-            </a:pPr>
-            <a:r>
-              <a:rPr lang="en-US" sz="2500" dirty="0"/>
-              <a:t>Static Fields &amp; Methods</a:t>
-            </a:r>
-          </a:p>
-          <a:p>
-            <a:pPr marR="0" eaLnBrk="1" hangingPunct="1">
-              <a:lnSpc>
-                <a:spcPct val="90000"/>
-              </a:lnSpc>
-            </a:pPr>
-            <a:endParaRPr lang="en-US" sz="2500" dirty="0"/>
-          </a:p>
-        </p:txBody>
-      </p:sp>
-      <p:sp>
-        <p:nvSpPr>
-          <p:cNvPr id="3" name="Rectangle 2">
-            <a:extLst>
-              <a:ext uri="{FF2B5EF4-FFF2-40B4-BE49-F238E27FC236}">
-                <a16:creationId xmlns:a16="http://schemas.microsoft.com/office/drawing/2014/main" id="{0D3B4C52-3679-057F-B9FA-C5E3B4259E4D}"/>
-              </a:ext>
-            </a:extLst>
-          </p:cNvPr>
-          <p:cNvSpPr/>
-          <p:nvPr/>
-        </p:nvSpPr>
-        <p:spPr>
-          <a:xfrm>
-            <a:off x="304800" y="4762500"/>
-            <a:ext cx="8534400" cy="1565186"/>
-          </a:xfrm>
-          <a:prstGeom prst="rect">
-            <a:avLst/>
-          </a:prstGeom>
-        </p:spPr>
-        <p:style>
-          <a:lnRef idx="2">
-            <a:schemeClr val="accent3">
-              <a:shade val="50000"/>
-            </a:schemeClr>
-          </a:lnRef>
-          <a:fillRef idx="1">
-            <a:schemeClr val="accent3"/>
-          </a:fillRef>
-          <a:effectRef idx="0">
-            <a:schemeClr val="accent3"/>
-          </a:effectRef>
-          <a:fontRef idx="minor">
-            <a:schemeClr val="lt1"/>
-          </a:fontRef>
-        </p:style>
-        <p:txBody>
-          <a:bodyPr rtlCol="0" anchor="ctr"/>
-          <a:lstStyle/>
-          <a:p>
-            <a:r>
-              <a:rPr lang="en-US" sz="2400" dirty="0">
-                <a:solidFill>
-                  <a:srgbClr val="FFFFFF"/>
-                </a:solidFill>
-              </a:rPr>
-              <a:t>The </a:t>
-            </a:r>
-            <a:r>
-              <a:rPr lang="en-US" sz="2400" i="1" dirty="0">
-                <a:solidFill>
-                  <a:srgbClr val="FFFFFF"/>
-                </a:solidFill>
-              </a:rPr>
-              <a:t>git</a:t>
-            </a:r>
-            <a:r>
-              <a:rPr lang="en-US" sz="2400" dirty="0">
-                <a:solidFill>
-                  <a:srgbClr val="FFFFFF"/>
-                </a:solidFill>
-              </a:rPr>
-              <a:t> projects for today are:</a:t>
-            </a:r>
-          </a:p>
-          <a:p>
-            <a:pPr marL="342900" indent="-342900">
-              <a:buFont typeface="Arial" panose="020B0604020202020204" pitchFamily="34" charset="0"/>
-              <a:buChar char="•"/>
-            </a:pPr>
-            <a:r>
-              <a:rPr lang="en-US" sz="2400" i="1" dirty="0" err="1"/>
-              <a:t>PracticeSuperSimpleObjects</a:t>
-            </a:r>
-            <a:endParaRPr lang="en-US" sz="2400" i="1" dirty="0"/>
-          </a:p>
-          <a:p>
-            <a:pPr marL="342900" indent="-342900">
-              <a:buFont typeface="Arial" panose="020B0604020202020204" pitchFamily="34" charset="0"/>
-              <a:buChar char="•"/>
-            </a:pPr>
-            <a:r>
-              <a:rPr lang="en-US" sz="2400" i="1" dirty="0" err="1"/>
-              <a:t>PracticeSuperSimpleObjectsSolution</a:t>
-            </a:r>
-            <a:endParaRPr lang="en-US" sz="2400" i="1" dirty="0"/>
-          </a:p>
-          <a:p>
-            <a:pPr marL="342900" indent="-342900">
-              <a:buFont typeface="Arial" panose="020B0604020202020204" pitchFamily="34" charset="0"/>
-              <a:buChar char="•"/>
-            </a:pPr>
-            <a:r>
-              <a:rPr lang="en-US" sz="2400" i="1" dirty="0" err="1"/>
-              <a:t>PracticeSuperSimpleObjectsBoxAndPointers</a:t>
-            </a:r>
-            <a:endParaRPr lang="en-US" sz="2400" i="1" dirty="0"/>
-          </a:p>
-        </p:txBody>
-      </p:sp>
-    </p:spTree>
-    <p:extLst>
-      <p:ext uri="{BB962C8B-B14F-4D97-AF65-F5344CB8AC3E}">
-        <p14:creationId xmlns:p14="http://schemas.microsoft.com/office/powerpoint/2010/main" val="2692914782"/>
-      </p:ext>
-    </p:extLst>
-  </p:cSld>
-  <p:clrMapOvr>
-    <a:masterClrMapping/>
-  </p:clrMapOvr>
-</p:sld>
-</file>
-
-<file path=ppt/slides/slide11.xml><?xml version="1.0" encoding="utf-8"?>
 <p:sld xmlns:a="http://schemas.openxmlformats.org/drawingml/2006/main" xmlns:r="http://schemas.openxmlformats.org/officeDocument/2006/relationships" xmlns:p="http://schemas.openxmlformats.org/presentationml/2006/main">
   <p:cSld>
     <p:spTree>
@@ -7631,7 +7017,7 @@
 </p:sld>
 </file>
 
-<file path=ppt/slides/slide12.xml><?xml version="1.0" encoding="utf-8"?>
+<file path=ppt/slides/slide11.xml><?xml version="1.0" encoding="utf-8"?>
 <p:sld xmlns:a="http://schemas.openxmlformats.org/drawingml/2006/main" xmlns:r="http://schemas.openxmlformats.org/officeDocument/2006/relationships" xmlns:p="http://schemas.openxmlformats.org/presentationml/2006/main">
   <p:cSld>
     <p:spTree>
@@ -9202,7 +8588,7 @@
 </p:sld>
 </file>
 
-<file path=ppt/slides/slide13.xml><?xml version="1.0" encoding="utf-8"?>
+<file path=ppt/slides/slide12.xml><?xml version="1.0" encoding="utf-8"?>
 <p:sld xmlns:a="http://schemas.openxmlformats.org/drawingml/2006/main" xmlns:r="http://schemas.openxmlformats.org/officeDocument/2006/relationships" xmlns:p="http://schemas.openxmlformats.org/presentationml/2006/main" show="0">
   <p:cSld>
     <p:spTree>
@@ -9317,7 +8703,7 @@
 </p:sld>
 </file>
 
-<file path=ppt/slides/slide14.xml><?xml version="1.0" encoding="utf-8"?>
+<file path=ppt/slides/slide13.xml><?xml version="1.0" encoding="utf-8"?>
 <p:sld xmlns:a="http://schemas.openxmlformats.org/drawingml/2006/main" xmlns:r="http://schemas.openxmlformats.org/officeDocument/2006/relationships" xmlns:p="http://schemas.openxmlformats.org/presentationml/2006/main">
   <p:cSld>
     <p:spTree>
@@ -9567,6 +8953,419 @@
   <p:clrMapOvr>
     <a:masterClrMapping/>
   </p:clrMapOvr>
+</p:sld>
+</file>
+
+<file path=ppt/slides/slide14.xml><?xml version="1.0" encoding="utf-8"?>
+<p:sld xmlns:a="http://schemas.openxmlformats.org/drawingml/2006/main" xmlns:r="http://schemas.openxmlformats.org/officeDocument/2006/relationships" xmlns:p="http://schemas.openxmlformats.org/presentationml/2006/main">
+  <p:cSld>
+    <p:spTree>
+      <p:nvGrpSpPr>
+        <p:cNvPr id="1" name=""/>
+        <p:cNvGrpSpPr/>
+        <p:nvPr/>
+      </p:nvGrpSpPr>
+      <p:grpSpPr>
+        <a:xfrm>
+          <a:off x="0" y="0"/>
+          <a:ext cx="0" cy="0"/>
+          <a:chOff x="0" y="0"/>
+          <a:chExt cx="0" cy="0"/>
+        </a:xfrm>
+      </p:grpSpPr>
+      <p:sp>
+        <p:nvSpPr>
+          <p:cNvPr id="223" name="TextShape 1"/>
+          <p:cNvSpPr txBox="1"/>
+          <p:nvPr/>
+        </p:nvSpPr>
+        <p:spPr>
+          <a:xfrm>
+            <a:off x="457200" y="274680"/>
+            <a:ext cx="8229240" cy="1142640"/>
+          </a:xfrm>
+          <a:prstGeom prst="rect">
+            <a:avLst/>
+          </a:prstGeom>
+          <a:noFill/>
+          <a:ln>
+            <a:noFill/>
+          </a:ln>
+        </p:spPr>
+        <p:txBody>
+          <a:bodyPr anchor="ctr"/>
+          <a:lstStyle/>
+          <a:p>
+            <a:pPr algn="ctr">
+              <a:lnSpc>
+                <a:spcPct val="100000"/>
+              </a:lnSpc>
+            </a:pPr>
+            <a:r>
+              <a:rPr lang="en-US" sz="4400" b="0" strike="noStrike" spc="-1">
+                <a:solidFill>
+                  <a:srgbClr val="000000"/>
+                </a:solidFill>
+                <a:uFill>
+                  <a:solidFill>
+                    <a:srgbClr val="FFFFFF"/>
+                  </a:solidFill>
+                </a:uFill>
+                <a:latin typeface="Calibri"/>
+              </a:rPr>
+              <a:t>When do we make fields static?</a:t>
+            </a:r>
+            <a:endParaRPr lang="en-US" sz="4400" b="0" strike="noStrike" spc="-1">
+              <a:solidFill>
+                <a:srgbClr val="000000"/>
+              </a:solidFill>
+              <a:uFill>
+                <a:solidFill>
+                  <a:srgbClr val="FFFFFF"/>
+                </a:solidFill>
+              </a:uFill>
+              <a:latin typeface="Arial"/>
+            </a:endParaRPr>
+          </a:p>
+        </p:txBody>
+      </p:sp>
+      <p:sp>
+        <p:nvSpPr>
+          <p:cNvPr id="224" name="TextShape 2"/>
+          <p:cNvSpPr txBox="1"/>
+          <p:nvPr/>
+        </p:nvSpPr>
+        <p:spPr>
+          <a:xfrm>
+            <a:off x="457200" y="1600200"/>
+            <a:ext cx="8229240" cy="4200245"/>
+          </a:xfrm>
+          <a:prstGeom prst="rect">
+            <a:avLst/>
+          </a:prstGeom>
+          <a:noFill/>
+          <a:ln>
+            <a:noFill/>
+          </a:ln>
+        </p:spPr>
+        <p:txBody>
+          <a:bodyPr/>
+          <a:lstStyle/>
+          <a:p>
+            <a:pPr marL="343080" indent="-342720">
+              <a:lnSpc>
+                <a:spcPct val="100000"/>
+              </a:lnSpc>
+              <a:buClr>
+                <a:srgbClr val="000000"/>
+              </a:buClr>
+              <a:buFont typeface="Arial"/>
+              <a:buChar char="•"/>
+            </a:pPr>
+            <a:r>
+              <a:rPr lang="en-US" sz="3200" b="0" strike="noStrike" spc="-1" dirty="0">
+                <a:solidFill>
+                  <a:srgbClr val="000000"/>
+                </a:solidFill>
+                <a:uFill>
+                  <a:solidFill>
+                    <a:srgbClr val="FFFFFF"/>
+                  </a:solidFill>
+                </a:uFill>
+                <a:latin typeface="Calibri"/>
+              </a:rPr>
+              <a:t>Never</a:t>
+            </a:r>
+          </a:p>
+          <a:p>
+            <a:pPr marL="743040" lvl="1" indent="-285480">
+              <a:lnSpc>
+                <a:spcPct val="100000"/>
+              </a:lnSpc>
+              <a:buClr>
+                <a:srgbClr val="000000"/>
+              </a:buClr>
+              <a:buFont typeface="Arial"/>
+              <a:buChar char="–"/>
+            </a:pPr>
+            <a:r>
+              <a:rPr lang="en-US" sz="2800" b="0" strike="noStrike" spc="-1" dirty="0">
+                <a:solidFill>
+                  <a:srgbClr val="000000"/>
+                </a:solidFill>
+                <a:uFill>
+                  <a:solidFill>
+                    <a:srgbClr val="FFFFFF"/>
+                  </a:solidFill>
+                </a:uFill>
+                <a:latin typeface="Calibri"/>
+              </a:rPr>
+              <a:t>Seriously, this is disallowed for all the code you submit in CSSE220 (exception: CONSTANTS)</a:t>
+            </a:r>
+            <a:endParaRPr lang="en-US" sz="2400" b="0" strike="noStrike" spc="-1" dirty="0">
+              <a:solidFill>
+                <a:srgbClr val="000000"/>
+              </a:solidFill>
+              <a:uFill>
+                <a:solidFill>
+                  <a:srgbClr val="FFFFFF"/>
+                </a:solidFill>
+              </a:uFill>
+              <a:latin typeface="Calibri"/>
+            </a:endParaRPr>
+          </a:p>
+          <a:p>
+            <a:pPr marL="743040" lvl="1" indent="-285480">
+              <a:lnSpc>
+                <a:spcPct val="100000"/>
+              </a:lnSpc>
+              <a:buClr>
+                <a:srgbClr val="000000"/>
+              </a:buClr>
+              <a:buFont typeface="Arial"/>
+              <a:buChar char="–"/>
+            </a:pPr>
+            <a:r>
+              <a:rPr lang="en-US" sz="2800" b="0" strike="noStrike" spc="-1" dirty="0">
+                <a:solidFill>
+                  <a:srgbClr val="000000"/>
+                </a:solidFill>
+                <a:uFill>
+                  <a:solidFill>
+                    <a:srgbClr val="FFFFFF"/>
+                  </a:solidFill>
+                </a:uFill>
+                <a:latin typeface="Calibri"/>
+              </a:rPr>
+              <a:t>It almost always makes your designs worse</a:t>
+            </a:r>
+            <a:endParaRPr lang="en-US" sz="2400" b="0" strike="noStrike" spc="-1" dirty="0">
+              <a:solidFill>
+                <a:srgbClr val="000000"/>
+              </a:solidFill>
+              <a:uFill>
+                <a:solidFill>
+                  <a:srgbClr val="FFFFFF"/>
+                </a:solidFill>
+              </a:uFill>
+              <a:latin typeface="Calibri"/>
+            </a:endParaRPr>
+          </a:p>
+          <a:p>
+            <a:pPr marL="343080" indent="-342720">
+              <a:lnSpc>
+                <a:spcPct val="100000"/>
+              </a:lnSpc>
+              <a:buClr>
+                <a:srgbClr val="000000"/>
+              </a:buClr>
+              <a:buFont typeface="Arial"/>
+              <a:buChar char="•"/>
+            </a:pPr>
+            <a:r>
+              <a:rPr lang="en-US" sz="3200" b="0" strike="noStrike" spc="-1" dirty="0">
+                <a:solidFill>
+                  <a:srgbClr val="000000"/>
+                </a:solidFill>
+                <a:uFill>
+                  <a:solidFill>
+                    <a:srgbClr val="FFFFFF"/>
+                  </a:solidFill>
+                </a:uFill>
+                <a:latin typeface="Calibri"/>
+              </a:rPr>
+              <a:t>If it wasn’t disallowed, when would you use it?</a:t>
+            </a:r>
+            <a:endParaRPr lang="en-US" sz="2800" b="0" strike="noStrike" spc="-1" dirty="0">
+              <a:solidFill>
+                <a:srgbClr val="000000"/>
+              </a:solidFill>
+              <a:uFill>
+                <a:solidFill>
+                  <a:srgbClr val="FFFFFF"/>
+                </a:solidFill>
+              </a:uFill>
+              <a:latin typeface="Calibri"/>
+            </a:endParaRPr>
+          </a:p>
+          <a:p>
+            <a:pPr marL="743040" lvl="1" indent="-285480">
+              <a:lnSpc>
+                <a:spcPct val="100000"/>
+              </a:lnSpc>
+              <a:buClr>
+                <a:srgbClr val="000000"/>
+              </a:buClr>
+              <a:buFont typeface="Arial"/>
+              <a:buChar char="–"/>
+            </a:pPr>
+            <a:r>
+              <a:rPr lang="en-US" sz="2800" b="0" strike="noStrike" spc="-1" dirty="0">
+                <a:solidFill>
+                  <a:srgbClr val="000000"/>
+                </a:solidFill>
+                <a:uFill>
+                  <a:solidFill>
+                    <a:srgbClr val="FFFFFF"/>
+                  </a:solidFill>
+                </a:uFill>
+                <a:latin typeface="Calibri"/>
+              </a:rPr>
+              <a:t>Very rarely for memory efficiency, state that can’t be duplicated, or really </a:t>
+            </a:r>
+            <a:r>
+              <a:rPr lang="en-US" sz="2800" b="0" i="1" strike="noStrike" spc="-1" dirty="0">
+                <a:solidFill>
+                  <a:srgbClr val="000000"/>
+                </a:solidFill>
+                <a:uFill>
+                  <a:solidFill>
+                    <a:srgbClr val="FFFFFF"/>
+                  </a:solidFill>
+                </a:uFill>
+                <a:latin typeface="Calibri"/>
+              </a:rPr>
+              <a:t>meta</a:t>
+            </a:r>
+            <a:r>
+              <a:rPr lang="en-US" sz="2800" b="0" strike="noStrike" spc="-1" dirty="0">
+                <a:solidFill>
+                  <a:srgbClr val="000000"/>
+                </a:solidFill>
+                <a:uFill>
+                  <a:solidFill>
+                    <a:srgbClr val="FFFFFF"/>
+                  </a:solidFill>
+                </a:uFill>
+                <a:latin typeface="Calibri"/>
+              </a:rPr>
+              <a:t> code/variables</a:t>
+            </a:r>
+            <a:endParaRPr lang="en-US" sz="2400" b="0" strike="noStrike" spc="-1" dirty="0">
+              <a:solidFill>
+                <a:srgbClr val="000000"/>
+              </a:solidFill>
+              <a:uFill>
+                <a:solidFill>
+                  <a:srgbClr val="FFFFFF"/>
+                </a:solidFill>
+              </a:uFill>
+              <a:latin typeface="Calibri"/>
+            </a:endParaRPr>
+          </a:p>
+          <a:p>
+            <a:pPr marL="743040" lvl="1" indent="-285480">
+              <a:lnSpc>
+                <a:spcPct val="100000"/>
+              </a:lnSpc>
+              <a:buClr>
+                <a:srgbClr val="000000"/>
+              </a:buClr>
+              <a:buFont typeface="Arial"/>
+              <a:buChar char="–"/>
+            </a:pPr>
+            <a:r>
+              <a:rPr lang="en-US" sz="2800" b="0" strike="noStrike" spc="-1" dirty="0">
+                <a:solidFill>
+                  <a:srgbClr val="000000"/>
+                </a:solidFill>
+                <a:uFill>
+                  <a:solidFill>
+                    <a:srgbClr val="FFFFFF"/>
+                  </a:solidFill>
+                </a:uFill>
+                <a:latin typeface="Calibri"/>
+              </a:rPr>
+              <a:t>BUT even professional programmers misuse static and cause themselves major problems</a:t>
+            </a:r>
+            <a:endParaRPr lang="en-US" sz="2400" b="0" strike="noStrike" spc="-1" dirty="0">
+              <a:solidFill>
+                <a:srgbClr val="000000"/>
+              </a:solidFill>
+              <a:uFill>
+                <a:solidFill>
+                  <a:srgbClr val="FFFFFF"/>
+                </a:solidFill>
+              </a:uFill>
+              <a:latin typeface="Calibri"/>
+            </a:endParaRPr>
+          </a:p>
+          <a:p>
+            <a:pPr marL="743040" lvl="1" indent="-285480">
+              <a:lnSpc>
+                <a:spcPct val="100000"/>
+              </a:lnSpc>
+              <a:buClr>
+                <a:srgbClr val="000000"/>
+              </a:buClr>
+              <a:buFont typeface="Arial"/>
+              <a:buChar char="–"/>
+            </a:pPr>
+            <a:r>
+              <a:rPr lang="en-US" sz="2800" b="0" strike="noStrike" spc="-1" dirty="0">
+                <a:solidFill>
+                  <a:srgbClr val="000000"/>
+                </a:solidFill>
+                <a:uFill>
+                  <a:solidFill>
+                    <a:srgbClr val="FFFFFF"/>
+                  </a:solidFill>
+                </a:uFill>
+                <a:latin typeface="Calibri"/>
+              </a:rPr>
+              <a:t>They’ll talk about some positive uses in CSSE374</a:t>
+            </a:r>
+            <a:endParaRPr lang="en-US" sz="2400" b="0" strike="noStrike" spc="-1" dirty="0">
+              <a:solidFill>
+                <a:srgbClr val="000000"/>
+              </a:solidFill>
+              <a:uFill>
+                <a:solidFill>
+                  <a:srgbClr val="FFFFFF"/>
+                </a:solidFill>
+              </a:uFill>
+              <a:latin typeface="Calibri"/>
+            </a:endParaRPr>
+          </a:p>
+        </p:txBody>
+      </p:sp>
+    </p:spTree>
+    <p:extLst>
+      <p:ext uri="{BB962C8B-B14F-4D97-AF65-F5344CB8AC3E}">
+        <p14:creationId xmlns:p14="http://schemas.microsoft.com/office/powerpoint/2010/main" val="4016243091"/>
+      </p:ext>
+    </p:extLst>
+  </p:cSld>
+  <p:clrMapOvr>
+    <a:masterClrMapping/>
+  </p:clrMapOvr>
+  <p:timing>
+    <p:tnLst>
+      <p:par>
+        <p:cTn id="1" dur="indefinite" restart="never" nodeType="tmRoot">
+          <p:childTnLst>
+            <p:seq>
+              <p:cTn id="2" nodeType="mainSeq"/>
+              <p:prevCondLst>
+                <p:cond evt="onPrev" delay="0">
+                  <p:tgtEl>
+                    <p:sldTgt/>
+                  </p:tgtEl>
+                </p:cond>
+              </p:prevCondLst>
+              <p:nextCondLst>
+                <p:cond evt="onNext" delay="0">
+                  <p:tgtEl>
+                    <p:sldTgt/>
+                  </p:tgtEl>
+                </p:cond>
+              </p:nextCondLst>
+            </p:seq>
+          </p:childTnLst>
+        </p:cTn>
+      </p:par>
+    </p:tnLst>
+  </p:timing>
 </p:sld>
 </file>
 
@@ -9616,7 +9415,7 @@
               </a:lnSpc>
             </a:pPr>
             <a:r>
-              <a:rPr lang="en-US" sz="4400" b="0" strike="noStrike" spc="-1">
+              <a:rPr lang="en-US" sz="4400" b="0" strike="noStrike" spc="-1" dirty="0">
                 <a:solidFill>
                   <a:srgbClr val="000000"/>
                 </a:solidFill>
@@ -9627,9 +9426,37 @@
                 </a:uFill>
                 <a:latin typeface="Calibri"/>
               </a:rPr>
-              <a:t>When do we make fields static?</a:t>
-            </a:r>
-            <a:endParaRPr lang="en-US" sz="4400" b="0" strike="noStrike" spc="-1">
+              <a:t>Two Example Classes </a:t>
+            </a:r>
+            <a:r>
+              <a:rPr lang="en-US" sz="4400" spc="-1" dirty="0">
+                <a:solidFill>
+                  <a:srgbClr val="000000"/>
+                </a:solidFill>
+                <a:uFill>
+                  <a:solidFill>
+                    <a:srgbClr val="FFFFFF"/>
+                  </a:solidFill>
+                </a:uFill>
+                <a:latin typeface="Calibri"/>
+              </a:rPr>
+              <a:t>W</a:t>
+            </a:r>
+            <a:r>
+              <a:rPr lang="en-US" sz="4400" b="0" strike="noStrike" spc="-1" dirty="0">
+                <a:solidFill>
+                  <a:srgbClr val="000000"/>
+                </a:solidFill>
+                <a:uFill>
+                  <a:solidFill>
+                    <a:srgbClr val="FFFFFF"/>
+                  </a:solidFill>
+                </a:uFill>
+                <a:latin typeface="Calibri"/>
+              </a:rPr>
+              <a:t>ith Static</a:t>
+            </a:r>
+            <a:endParaRPr lang="en-US" sz="4400" b="0" strike="noStrike" spc="-1" dirty="0">
               <a:solidFill>
                 <a:srgbClr val="000000"/>
               </a:solidFill>
@@ -9652,7 +9479,7 @@
         <p:spPr>
           <a:xfrm>
             <a:off x="457200" y="1600200"/>
-            <a:ext cx="8229240" cy="4200245"/>
+            <a:ext cx="8229240" cy="4525560"/>
           </a:xfrm>
           <a:prstGeom prst="rect">
             <a:avLst/>
@@ -9688,82 +9515,8 @@
                 </a:uFill>
                 <a:latin typeface="Calibri"/>
               </a:rPr>
-              <a:t>Never</a:t>
-            </a:r>
-          </a:p>
-          <a:p>
-            <a:pPr marL="743040" lvl="1" indent="-285480">
-              <a:lnSpc>
-                <a:spcPct val="100000"/>
-              </a:lnSpc>
-              <a:buClr>
-                <a:srgbClr val="000000"/>
-              </a:buClr>
-              <a:buFont typeface="Arial"/>
-              <a:buChar char="–"/>
-            </a:pPr>
-            <a:r>
-              <a:rPr lang="en-US" sz="2800" b="0" strike="noStrike" spc="-1" dirty="0">
-                <a:solidFill>
-                  <a:srgbClr val="000000"/>
-                </a:solidFill>
-                <a:uFill>
-                  <a:solidFill>
-                    <a:srgbClr val="FFFFFF"/>
-                  </a:solidFill>
-                </a:uFill>
-                <a:latin typeface="Calibri"/>
-              </a:rPr>
-              <a:t>Seriously, this is disallowed for all the code you submit in CSSE220 (exception: CONSTANTS)</a:t>
-            </a:r>
-            <a:endParaRPr lang="en-US" sz="2400" b="0" strike="noStrike" spc="-1" dirty="0">
-              <a:solidFill>
-                <a:srgbClr val="000000"/>
-              </a:solidFill>
-              <a:uFill>
-                <a:solidFill>
-                  <a:srgbClr val="FFFFFF"/>
-                </a:solidFill>
-              </a:uFill>
-              <a:latin typeface="Calibri"/>
-            </a:endParaRPr>
-          </a:p>
-          <a:p>
-            <a:pPr marL="743040" lvl="1" indent="-285480">
-              <a:lnSpc>
-                <a:spcPct val="100000"/>
-              </a:lnSpc>
-              <a:buClr>
-                <a:srgbClr val="000000"/>
-              </a:buClr>
-              <a:buFont typeface="Arial"/>
-              <a:buChar char="–"/>
-            </a:pPr>
-            <a:r>
-              <a:rPr lang="en-US" sz="2800" b="0" strike="noStrike" spc="-1" dirty="0">
-                <a:solidFill>
-                  <a:srgbClr val="000000"/>
-                </a:solidFill>
-                <a:uFill>
-                  <a:solidFill>
-                    <a:srgbClr val="FFFFFF"/>
-                  </a:solidFill>
-                </a:uFill>
-                <a:latin typeface="Calibri"/>
-              </a:rPr>
-              <a:t>It almost always makes your designs worse</a:t>
-            </a:r>
-            <a:endParaRPr lang="en-US" sz="2400" b="0" strike="noStrike" spc="-1" dirty="0">
-              <a:solidFill>
-                <a:srgbClr val="000000"/>
-              </a:solidFill>
-              <a:uFill>
-                <a:solidFill>
-                  <a:srgbClr val="FFFFFF"/>
-                </a:solidFill>
-              </a:uFill>
-              <a:latin typeface="Calibri"/>
-            </a:endParaRPr>
+              <a:t>Car</a:t>
+            </a:r>
           </a:p>
           <a:p>
             <a:pPr marL="343080" indent="-342720">
@@ -9777,7 +9530,7 @@
               <a:buChar char="•"/>
             </a:pPr>
             <a:r>
-              <a:rPr lang="en-US" sz="3200" b="0" strike="noStrike" spc="-1" dirty="0">
+              <a:rPr lang="en-US" sz="3200" spc="-1" dirty="0">
                 <a:solidFill>
                   <a:srgbClr val="000000"/>
                 </a:solidFill>
@@ -9788,72 +9541,7 @@
                 </a:uFill>
                 <a:latin typeface="Calibri"/>
               </a:rPr>
-              <a:t>If it wasn’t disallowed, when would you use it?</a:t>
-            </a:r>
-            <a:endParaRPr lang="en-US" sz="2800" b="0" strike="noStrike" spc="-1" dirty="0">
-              <a:solidFill>
-                <a:srgbClr val="000000"/>
-              </a:solidFill>
-              <a:uFill>
-                <a:solidFill>
-                  <a:srgbClr val="FFFFFF"/>
-                </a:solidFill>
-              </a:uFill>
-              <a:latin typeface="Calibri"/>
-            </a:endParaRPr>
-          </a:p>
-          <a:p>
-            <a:pPr marL="743040" lvl="1" indent="-285480">
-              <a:lnSpc>
-                <a:spcPct val="100000"/>
-              </a:lnSpc>
-              <a:buClr>
-                <a:srgbClr val="000000"/>
-              </a:buClr>
-              <a:buFont typeface="Arial"/>
-              <a:buChar char="–"/>
-            </a:pPr>
-            <a:r>
-              <a:rPr lang="en-US" sz="2800" b="0" strike="noStrike" spc="-1" dirty="0">
-                <a:solidFill>
-                  <a:srgbClr val="000000"/>
-                </a:solidFill>
-                <a:uFill>
-                  <a:solidFill>
-                    <a:srgbClr val="FFFFFF"/>
-                  </a:solidFill>
-                </a:uFill>
-                <a:latin typeface="Calibri"/>
-              </a:rPr>
-              <a:t>Very rarely for memory efficiency, state that can’t be duplicated, or really </a:t>
-            </a:r>
-            <a:r>
-              <a:rPr lang="en-US" sz="2800" b="0" i="1" strike="noStrike" spc="-1" dirty="0">
-                <a:solidFill>
-                  <a:srgbClr val="000000"/>
-                </a:solidFill>
-                <a:uFill>
-                  <a:solidFill>
-                    <a:srgbClr val="FFFFFF"/>
-                  </a:solidFill>
-                </a:uFill>
-                <a:latin typeface="Calibri"/>
-              </a:rPr>
-              <a:t>meta</a:t>
-            </a:r>
-            <a:r>
-              <a:rPr lang="en-US" sz="2800" b="0" strike="noStrike" spc="-1" dirty="0">
-                <a:solidFill>
-                  <a:srgbClr val="000000"/>
-                </a:solidFill>
-                <a:uFill>
-                  <a:solidFill>
-                    <a:srgbClr val="FFFFFF"/>
-                  </a:solidFill>
-                </a:uFill>
-                <a:latin typeface="Calibri"/>
-              </a:rPr>
-              <a:t> code/variables</a:t>
+              <a:t>Bicycle</a:t>
             </a:r>
             <a:endParaRPr lang="en-US" sz="2400" b="0" strike="noStrike" spc="-1" dirty="0">
               <a:solidFill>
@@ -9867,86 +9555,12 @@
               <a:latin typeface="Calibri"/>
             </a:endParaRPr>
           </a:p>
-          <a:p>
-            <a:pPr marL="743040" lvl="1" indent="-285480">
-              <a:lnSpc>
-                <a:spcPct val="100000"/>
-              </a:lnSpc>
-              <a:buClr>
-                <a:srgbClr val="000000"/>
-              </a:buClr>
-              <a:buFont typeface="Arial"/>
-              <a:buChar char="–"/>
-            </a:pPr>
-            <a:r>
-              <a:rPr lang="en-US" sz="2800" b="0" strike="noStrike" spc="-1" dirty="0">
-                <a:solidFill>
-                  <a:srgbClr val="000000"/>
-                </a:solidFill>
-                <a:uFill>
-                  <a:solidFill>
-                    <a:srgbClr val="FFFFFF"/>
-                  </a:solidFill>
-                </a:uFill>
-                <a:latin typeface="Calibri"/>
-              </a:rPr>
-              <a:t>BUT even professional programmers misuse static and cause themselves major problems</a:t>
-            </a:r>
-            <a:endParaRPr lang="en-US" sz="2400" b="0" strike="noStrike" spc="-1" dirty="0">
-              <a:solidFill>
-                <a:srgbClr val="000000"/>
-              </a:solidFill>
-              <a:uFill>
-                <a:solidFill>
-                  <a:srgbClr val="FFFFFF"/>
-                </a:solidFill>
-              </a:uFill>
-              <a:latin typeface="Calibri"/>
-            </a:endParaRPr>
-          </a:p>
-          <a:p>
-            <a:pPr marL="743040" lvl="1" indent="-285480">
-              <a:lnSpc>
-                <a:spcPct val="100000"/>
-              </a:lnSpc>
-              <a:buClr>
-                <a:srgbClr val="000000"/>
-              </a:buClr>
-              <a:buFont typeface="Arial"/>
-              <a:buChar char="–"/>
-            </a:pPr>
-            <a:r>
-              <a:rPr lang="en-US" sz="2800" b="0" strike="noStrike" spc="-1" dirty="0">
-                <a:solidFill>
-                  <a:srgbClr val="000000"/>
-                </a:solidFill>
-                <a:uFill>
-                  <a:solidFill>
-                    <a:srgbClr val="FFFFFF"/>
-                  </a:solidFill>
-                </a:uFill>
-                <a:latin typeface="Calibri"/>
-              </a:rPr>
-              <a:t>They’ll talk about some positive uses in CSSE374</a:t>
-            </a:r>
-            <a:endParaRPr lang="en-US" sz="2400" b="0" strike="noStrike" spc="-1" dirty="0">
-              <a:solidFill>
-                <a:srgbClr val="000000"/>
-              </a:solidFill>
-              <a:uFill>
-                <a:solidFill>
-                  <a:srgbClr val="FFFFFF"/>
-                </a:solidFill>
-              </a:uFill>
-              <a:latin typeface="Calibri"/>
-            </a:endParaRPr>
-          </a:p>
         </p:txBody>
       </p:sp>
     </p:spTree>
     <p:extLst>
       <p:ext uri="{BB962C8B-B14F-4D97-AF65-F5344CB8AC3E}">
-        <p14:creationId xmlns:p14="http://schemas.microsoft.com/office/powerpoint/2010/main" val="4016243091"/>
+        <p14:creationId xmlns:p14="http://schemas.microsoft.com/office/powerpoint/2010/main" val="978545204"/>
       </p:ext>
     </p:extLst>
   </p:cSld>
@@ -10002,234 +9616,6 @@
       </p:grpSpPr>
       <p:sp>
         <p:nvSpPr>
-          <p:cNvPr id="223" name="TextShape 1"/>
-          <p:cNvSpPr txBox="1"/>
-          <p:nvPr/>
-        </p:nvSpPr>
-        <p:spPr>
-          <a:xfrm>
-            <a:off x="457200" y="274680"/>
-            <a:ext cx="8229240" cy="1142640"/>
-          </a:xfrm>
-          <a:prstGeom prst="rect">
-            <a:avLst/>
-          </a:prstGeom>
-          <a:noFill/>
-          <a:ln>
-            <a:noFill/>
-          </a:ln>
-        </p:spPr>
-        <p:txBody>
-          <a:bodyPr anchor="ctr"/>
-          <a:lstStyle/>
-          <a:p>
-            <a:pPr algn="ctr">
-              <a:lnSpc>
-                <a:spcPct val="100000"/>
-              </a:lnSpc>
-            </a:pPr>
-            <a:r>
-              <a:rPr lang="en-US" sz="4400" b="0" strike="noStrike" spc="-1" dirty="0">
-                <a:solidFill>
-                  <a:srgbClr val="000000"/>
-                </a:solidFill>
-                <a:uFill>
-                  <a:solidFill>
-                    <a:srgbClr val="FFFFFF"/>
-                  </a:solidFill>
-                </a:uFill>
-                <a:latin typeface="Calibri"/>
-              </a:rPr>
-              <a:t>Two Example Classes </a:t>
-            </a:r>
-            <a:r>
-              <a:rPr lang="en-US" sz="4400" spc="-1" dirty="0">
-                <a:solidFill>
-                  <a:srgbClr val="000000"/>
-                </a:solidFill>
-                <a:uFill>
-                  <a:solidFill>
-                    <a:srgbClr val="FFFFFF"/>
-                  </a:solidFill>
-                </a:uFill>
-                <a:latin typeface="Calibri"/>
-              </a:rPr>
-              <a:t>W</a:t>
-            </a:r>
-            <a:r>
-              <a:rPr lang="en-US" sz="4400" b="0" strike="noStrike" spc="-1" dirty="0">
-                <a:solidFill>
-                  <a:srgbClr val="000000"/>
-                </a:solidFill>
-                <a:uFill>
-                  <a:solidFill>
-                    <a:srgbClr val="FFFFFF"/>
-                  </a:solidFill>
-                </a:uFill>
-                <a:latin typeface="Calibri"/>
-              </a:rPr>
-              <a:t>ith Static</a:t>
-            </a:r>
-            <a:endParaRPr lang="en-US" sz="4400" b="0" strike="noStrike" spc="-1" dirty="0">
-              <a:solidFill>
-                <a:srgbClr val="000000"/>
-              </a:solidFill>
-              <a:uFill>
-                <a:solidFill>
-                  <a:srgbClr val="FFFFFF"/>
-                </a:solidFill>
-              </a:uFill>
-              <a:latin typeface="Arial"/>
-            </a:endParaRPr>
-          </a:p>
-        </p:txBody>
-      </p:sp>
-      <p:sp>
-        <p:nvSpPr>
-          <p:cNvPr id="224" name="TextShape 2"/>
-          <p:cNvSpPr txBox="1"/>
-          <p:nvPr/>
-        </p:nvSpPr>
-        <p:spPr>
-          <a:xfrm>
-            <a:off x="457200" y="1600200"/>
-            <a:ext cx="8229240" cy="4525560"/>
-          </a:xfrm>
-          <a:prstGeom prst="rect">
-            <a:avLst/>
-          </a:prstGeom>
-          <a:noFill/>
-          <a:ln>
-            <a:noFill/>
-          </a:ln>
-        </p:spPr>
-        <p:txBody>
-          <a:bodyPr/>
-          <a:lstStyle/>
-          <a:p>
-            <a:pPr marL="343080" indent="-342720">
-              <a:lnSpc>
-                <a:spcPct val="100000"/>
-              </a:lnSpc>
-              <a:buClr>
-                <a:srgbClr val="000000"/>
-              </a:buClr>
-              <a:buFont typeface="Arial"/>
-              <a:buChar char="•"/>
-            </a:pPr>
-            <a:r>
-              <a:rPr lang="en-US" sz="3200" b="0" strike="noStrike" spc="-1" dirty="0">
-                <a:solidFill>
-                  <a:srgbClr val="000000"/>
-                </a:solidFill>
-                <a:uFill>
-                  <a:solidFill>
-                    <a:srgbClr val="FFFFFF"/>
-                  </a:solidFill>
-                </a:uFill>
-                <a:latin typeface="Calibri"/>
-              </a:rPr>
-              <a:t>Car</a:t>
-            </a:r>
-          </a:p>
-          <a:p>
-            <a:pPr marL="343080" indent="-342720">
-              <a:lnSpc>
-                <a:spcPct val="100000"/>
-              </a:lnSpc>
-              <a:buClr>
-                <a:srgbClr val="000000"/>
-              </a:buClr>
-              <a:buFont typeface="Arial"/>
-              <a:buChar char="•"/>
-            </a:pPr>
-            <a:r>
-              <a:rPr lang="en-US" sz="3200" spc="-1" dirty="0">
-                <a:solidFill>
-                  <a:srgbClr val="000000"/>
-                </a:solidFill>
-                <a:uFill>
-                  <a:solidFill>
-                    <a:srgbClr val="FFFFFF"/>
-                  </a:solidFill>
-                </a:uFill>
-                <a:latin typeface="Calibri"/>
-              </a:rPr>
-              <a:t>Bicycle</a:t>
-            </a:r>
-            <a:endParaRPr lang="en-US" sz="2400" b="0" strike="noStrike" spc="-1" dirty="0">
-              <a:solidFill>
-                <a:srgbClr val="000000"/>
-              </a:solidFill>
-              <a:uFill>
-                <a:solidFill>
-                  <a:srgbClr val="FFFFFF"/>
-                </a:solidFill>
-              </a:uFill>
-              <a:latin typeface="Calibri"/>
-            </a:endParaRPr>
-          </a:p>
-        </p:txBody>
-      </p:sp>
-    </p:spTree>
-    <p:extLst>
-      <p:ext uri="{BB962C8B-B14F-4D97-AF65-F5344CB8AC3E}">
-        <p14:creationId xmlns:p14="http://schemas.microsoft.com/office/powerpoint/2010/main" val="978545204"/>
-      </p:ext>
-    </p:extLst>
-  </p:cSld>
-  <p:clrMapOvr>
-    <a:masterClrMapping/>
-  </p:clrMapOvr>
-  <p:timing>
-    <p:tnLst>
-      <p:par>
-        <p:cTn id="1" dur="indefinite" restart="never" nodeType="tmRoot">
-          <p:childTnLst>
-            <p:seq>
-              <p:cTn id="2" nodeType="mainSeq"/>
-              <p:prevCondLst>
-                <p:cond evt="onPrev" delay="0">
-                  <p:tgtEl>
-                    <p:sldTgt/>
-                  </p:tgtEl>
-                </p:cond>
-              </p:prevCondLst>
-              <p:nextCondLst>
-                <p:cond evt="onNext" delay="0">
-                  <p:tgtEl>
-                    <p:sldTgt/>
-                  </p:tgtEl>
-                </p:cond>
-              </p:nextCondLst>
-            </p:seq>
-          </p:childTnLst>
-        </p:cTn>
-      </p:par>
-    </p:tnLst>
-  </p:timing>
-</p:sld>
-</file>
-
-<file path=ppt/slides/slide17.xml><?xml version="1.0" encoding="utf-8"?>
-<p:sld xmlns:a="http://schemas.openxmlformats.org/drawingml/2006/main" xmlns:r="http://schemas.openxmlformats.org/officeDocument/2006/relationships" xmlns:p="http://schemas.openxmlformats.org/presentationml/2006/main">
-  <p:cSld>
-    <p:spTree>
-      <p:nvGrpSpPr>
-        <p:cNvPr id="1" name=""/>
-        <p:cNvGrpSpPr/>
-        <p:nvPr/>
-      </p:nvGrpSpPr>
-      <p:grpSpPr>
-        <a:xfrm>
-          <a:off x="0" y="0"/>
-          <a:ext cx="0" cy="0"/>
-          <a:chOff x="0" y="0"/>
-          <a:chExt cx="0" cy="0"/>
-        </a:xfrm>
-      </p:grpSpPr>
-      <p:sp>
-        <p:nvSpPr>
           <p:cNvPr id="6" name="Rectangle 5"/>
           <p:cNvSpPr/>
           <p:nvPr/>
@@ -11079,7 +10465,7 @@
 </p:sld>
 </file>
 
-<file path=ppt/slides/slide18.xml><?xml version="1.0" encoding="utf-8"?>
+<file path=ppt/slides/slide17.xml><?xml version="1.0" encoding="utf-8"?>
 <p:sld xmlns:a="http://schemas.openxmlformats.org/drawingml/2006/main" xmlns:r="http://schemas.openxmlformats.org/officeDocument/2006/relationships" xmlns:p="http://schemas.openxmlformats.org/presentationml/2006/main">
   <p:cSld>
     <p:spTree>
@@ -12305,6 +11691,167 @@
 </p:sld>
 </file>
 
+<file path=ppt/slides/slide18.xml><?xml version="1.0" encoding="utf-8"?>
+<p:sld xmlns:a="http://schemas.openxmlformats.org/drawingml/2006/main" xmlns:r="http://schemas.openxmlformats.org/officeDocument/2006/relationships" xmlns:p="http://schemas.openxmlformats.org/presentationml/2006/main">
+  <p:cSld>
+    <p:spTree>
+      <p:nvGrpSpPr>
+        <p:cNvPr id="1" name=""/>
+        <p:cNvGrpSpPr/>
+        <p:nvPr/>
+      </p:nvGrpSpPr>
+      <p:grpSpPr>
+        <a:xfrm>
+          <a:off x="0" y="0"/>
+          <a:ext cx="0" cy="0"/>
+          <a:chOff x="0" y="0"/>
+          <a:chExt cx="0" cy="0"/>
+        </a:xfrm>
+      </p:grpSpPr>
+      <p:sp>
+        <p:nvSpPr>
+          <p:cNvPr id="2" name="Title 1"/>
+          <p:cNvSpPr>
+            <a:spLocks noGrp="1"/>
+          </p:cNvSpPr>
+          <p:nvPr>
+            <p:ph type="title"/>
+          </p:nvPr>
+        </p:nvSpPr>
+        <p:spPr/>
+        <p:txBody>
+          <a:bodyPr/>
+          <a:lstStyle/>
+          <a:p>
+            <a:r>
+              <a:rPr lang="en-US" dirty="0"/>
+              <a:t>Two ways to do one thing:</a:t>
+            </a:r>
+            <a:br>
+              <a:rPr lang="en-US" dirty="0"/>
+            </a:br>
+            <a:r>
+              <a:rPr lang="en-US" dirty="0"/>
+              <a:t>Static and Instance</a:t>
+            </a:r>
+          </a:p>
+        </p:txBody>
+      </p:sp>
+      <p:sp>
+        <p:nvSpPr>
+          <p:cNvPr id="3" name="Content Placeholder 2"/>
+          <p:cNvSpPr>
+            <a:spLocks noGrp="1"/>
+          </p:cNvSpPr>
+          <p:nvPr>
+            <p:ph idx="1"/>
+          </p:nvPr>
+        </p:nvSpPr>
+        <p:spPr/>
+        <p:txBody>
+          <a:bodyPr/>
+          <a:lstStyle/>
+          <a:p>
+            <a:r>
+              <a:rPr lang="en-US" dirty="0"/>
+              <a:t>Consider the Point class we used as a Quiz</a:t>
+            </a:r>
+          </a:p>
+          <a:p>
+            <a:r>
+              <a:rPr lang="en-US" dirty="0"/>
+              <a:t>Let’s write code to enable the following to run</a:t>
+            </a:r>
+          </a:p>
+          <a:p>
+            <a:endParaRPr lang="en-US" dirty="0"/>
+          </a:p>
+          <a:p>
+            <a:pPr marL="0" indent="0">
+              <a:buNone/>
+            </a:pPr>
+            <a:r>
+              <a:rPr lang="en-US" dirty="0"/>
+              <a:t>Point a = new Point( 0, 0 );</a:t>
+            </a:r>
+          </a:p>
+          <a:p>
+            <a:pPr marL="0" indent="0">
+              <a:buNone/>
+            </a:pPr>
+            <a:r>
+              <a:rPr lang="en-US" dirty="0"/>
+              <a:t>Point b = new Point( 3, 4);</a:t>
+            </a:r>
+          </a:p>
+          <a:p>
+            <a:pPr marL="0" indent="0">
+              <a:buNone/>
+            </a:pPr>
+            <a:r>
+              <a:rPr lang="en-US" dirty="0" err="1"/>
+              <a:t>System.out.println</a:t>
+            </a:r>
+            <a:r>
+              <a:rPr lang="en-US" dirty="0"/>
+              <a:t>(   </a:t>
+            </a:r>
+            <a:r>
+              <a:rPr lang="en-US" dirty="0" err="1"/>
+              <a:t>Point.distanceBetween</a:t>
+            </a:r>
+            <a:r>
+              <a:rPr lang="en-US" dirty="0"/>
+              <a:t>(</a:t>
+            </a:r>
+            <a:r>
+              <a:rPr lang="en-US" dirty="0" err="1"/>
+              <a:t>a,b</a:t>
+            </a:r>
+            <a:r>
+              <a:rPr lang="en-US" dirty="0"/>
+              <a:t>) );</a:t>
+            </a:r>
+          </a:p>
+          <a:p>
+            <a:pPr marL="0" indent="0">
+              <a:buNone/>
+            </a:pPr>
+            <a:r>
+              <a:rPr lang="en-US" dirty="0" err="1"/>
+              <a:t>System.out.println</a:t>
+            </a:r>
+            <a:r>
+              <a:rPr lang="en-US" dirty="0"/>
+              <a:t>(  </a:t>
+            </a:r>
+            <a:r>
+              <a:rPr lang="en-US" dirty="0" err="1"/>
+              <a:t>a.distanceTo</a:t>
+            </a:r>
+            <a:r>
+              <a:rPr lang="en-US" dirty="0"/>
+              <a:t>( b ) );</a:t>
+            </a:r>
+          </a:p>
+          <a:p>
+            <a:endParaRPr lang="en-US" dirty="0"/>
+          </a:p>
+        </p:txBody>
+      </p:sp>
+    </p:spTree>
+    <p:extLst>
+      <p:ext uri="{BB962C8B-B14F-4D97-AF65-F5344CB8AC3E}">
+        <p14:creationId xmlns:p14="http://schemas.microsoft.com/office/powerpoint/2010/main" val="377410102"/>
+      </p:ext>
+    </p:extLst>
+  </p:cSld>
+  <p:clrMapOvr>
+    <a:masterClrMapping/>
+  </p:clrMapOvr>
+</p:sld>
+</file>
+
 <file path=ppt/slides/slide19.xml><?xml version="1.0" encoding="utf-8"?>
 <p:sld xmlns:a="http://schemas.openxmlformats.org/drawingml/2006/main" xmlns:r="http://schemas.openxmlformats.org/officeDocument/2006/relationships" xmlns:p="http://schemas.openxmlformats.org/presentationml/2006/main">
   <p:cSld>
@@ -12339,14 +11886,7 @@
           <a:p>
             <a:r>
               <a:rPr lang="en-US" dirty="0"/>
-              <a:t>Two ways to do one thing:</a:t>
-            </a:r>
-            <a:br>
-              <a:rPr lang="en-US" dirty="0"/>
-            </a:br>
-            <a:r>
-              <a:rPr lang="en-US" dirty="0"/>
-              <a:t>Static and Instance</a:t>
+              <a:t>Live code</a:t>
             </a:r>
           </a:p>
         </p:txBody>
@@ -12366,97 +11906,14 @@
           <a:bodyPr/>
           <a:lstStyle/>
           <a:p>
-            <a:r>
-              <a:rPr lang="en-US" dirty="0"/>
-              <a:t>Consider the Point class we used as a Quiz</a:t>
-            </a:r>
-          </a:p>
-          <a:p>
-            <a:r>
-              <a:rPr lang="en-US" dirty="0"/>
-              <a:t>Let’s write code to enable the following to run</a:t>
-            </a:r>
-          </a:p>
-          <a:p>
-            <a:endParaRPr lang="en-US" dirty="0"/>
-          </a:p>
-          <a:p>
-            <a:pPr marL="0" indent="0">
-              <a:buNone/>
-            </a:pPr>
-            <a:r>
-              <a:rPr lang="en-US" dirty="0"/>
-              <a:t>Point a = new Point( 0, 0 );</a:t>
-            </a:r>
-          </a:p>
-          <a:p>
-            <a:pPr marL="0" indent="0">
-              <a:buNone/>
-            </a:pPr>
-            <a:r>
-              <a:rPr lang="en-US" dirty="0"/>
-              <a:t>Point b = new Point( 3, 4);</a:t>
-            </a:r>
-          </a:p>
-          <a:p>
-            <a:pPr marL="0" indent="0">
-              <a:buNone/>
-            </a:pPr>
-            <a:r>
-              <a:rPr lang="en-US" dirty="0" err="1"/>
-              <a:t>System.out.println</a:t>
-            </a:r>
-            <a:r>
-              <a:rPr lang="en-US" dirty="0"/>
-              <a:t>(   </a:t>
-            </a:r>
-            <a:r>
-              <a:rPr lang="en-US" dirty="0" err="1"/>
-              <a:t>Point.distanceBetween</a:t>
-            </a:r>
-            <a:r>
-              <a:rPr lang="en-US" dirty="0"/>
-              <a:t>(</a:t>
-            </a:r>
-            <a:r>
-              <a:rPr lang="en-US" dirty="0" err="1"/>
-              <a:t>a,b</a:t>
-            </a:r>
-            <a:r>
-              <a:rPr lang="en-US" dirty="0"/>
-              <a:t>) );</a:t>
-            </a:r>
-          </a:p>
-          <a:p>
-            <a:pPr marL="0" indent="0">
-              <a:buNone/>
-            </a:pPr>
-            <a:r>
-              <a:rPr lang="en-US" dirty="0" err="1"/>
-              <a:t>System.out.println</a:t>
-            </a:r>
-            <a:r>
-              <a:rPr lang="en-US" dirty="0"/>
-              <a:t>(  </a:t>
-            </a:r>
-            <a:r>
-              <a:rPr lang="en-US" dirty="0" err="1"/>
-              <a:t>a.distanceTo</a:t>
-            </a:r>
-            <a:r>
-              <a:rPr lang="en-US" dirty="0"/>
-              <a:t>( b ) );</a:t>
-            </a:r>
-          </a:p>
-          <a:p>
-            <a:endParaRPr lang="en-US" dirty="0"/>
+            <a:endParaRPr lang="en-US"/>
           </a:p>
         </p:txBody>
       </p:sp>
     </p:spTree>
     <p:extLst>
       <p:ext uri="{BB962C8B-B14F-4D97-AF65-F5344CB8AC3E}">
-        <p14:creationId xmlns:p14="http://schemas.microsoft.com/office/powerpoint/2010/main" val="377410102"/>
+        <p14:creationId xmlns:p14="http://schemas.microsoft.com/office/powerpoint/2010/main" val="614844681"/>
       </p:ext>
     </p:extLst>
   </p:cSld>
@@ -12485,62 +11942,162 @@
       </p:grpSpPr>
       <p:sp>
         <p:nvSpPr>
-          <p:cNvPr id="2" name="Title 1"/>
-          <p:cNvSpPr>
-            <a:spLocks noGrp="1"/>
-          </p:cNvSpPr>
-          <p:nvPr>
-            <p:ph type="title"/>
-          </p:nvPr>
+          <p:cNvPr id="127" name="TextShape 1"/>
+          <p:cNvSpPr txBox="1"/>
+          <p:nvPr/>
         </p:nvSpPr>
-        <p:spPr/>
+        <p:spPr>
+          <a:xfrm>
+            <a:off x="457200" y="274680"/>
+            <a:ext cx="8229240" cy="1142640"/>
+          </a:xfrm>
+          <a:prstGeom prst="rect">
+            <a:avLst/>
+          </a:prstGeom>
+          <a:noFill/>
+          <a:ln>
+            <a:noFill/>
+          </a:ln>
+        </p:spPr>
         <p:txBody>
-          <a:bodyPr/>
+          <a:bodyPr anchor="ctr"/>
           <a:lstStyle/>
           <a:p>
-            <a:r>
-              <a:rPr lang="en-US"/>
-              <a:t>Plan for today</a:t>
-            </a:r>
+            <a:pPr algn="ctr">
+              <a:lnSpc>
+                <a:spcPct val="100000"/>
+              </a:lnSpc>
+            </a:pPr>
+            <a:r>
+              <a:rPr lang="en-US" sz="4400" b="0" strike="noStrike" spc="-1">
+                <a:solidFill>
+                  <a:srgbClr val="000000"/>
+                </a:solidFill>
+                <a:uFill>
+                  <a:solidFill>
+                    <a:srgbClr val="FFFFFF"/>
+                  </a:solidFill>
+                </a:uFill>
+                <a:latin typeface="Calibri"/>
+              </a:rPr>
+              <a:t>Finishing up from last time...</a:t>
+            </a:r>
+            <a:endParaRPr lang="en-US" sz="4400" b="0" strike="noStrike" spc="-1">
+              <a:solidFill>
+                <a:srgbClr val="000000"/>
+              </a:solidFill>
+              <a:uFill>
+                <a:solidFill>
+                  <a:srgbClr val="FFFFFF"/>
+                </a:solidFill>
+              </a:uFill>
+              <a:latin typeface="Arial"/>
+            </a:endParaRPr>
           </a:p>
         </p:txBody>
       </p:sp>
       <p:sp>
         <p:nvSpPr>
-          <p:cNvPr id="3" name="Content Placeholder 2"/>
-          <p:cNvSpPr>
-            <a:spLocks noGrp="1"/>
-          </p:cNvSpPr>
-          <p:nvPr>
-            <p:ph idx="1"/>
-          </p:nvPr>
+          <p:cNvPr id="128" name="TextShape 2"/>
+          <p:cNvSpPr txBox="1"/>
+          <p:nvPr/>
         </p:nvSpPr>
-        <p:spPr/>
+        <p:spPr>
+          <a:xfrm>
+            <a:off x="457200" y="1600200"/>
+            <a:ext cx="8229240" cy="4525560"/>
+          </a:xfrm>
+          <a:prstGeom prst="rect">
+            <a:avLst/>
+          </a:prstGeom>
+          <a:noFill/>
+          <a:ln>
+            <a:noFill/>
+          </a:ln>
+        </p:spPr>
         <p:txBody>
           <a:bodyPr/>
           <a:lstStyle/>
           <a:p>
-            <a:r>
-              <a:rPr lang="en-US"/>
-              <a:t>Talk about object references and box and pointer diagrams</a:t>
-            </a:r>
-          </a:p>
-          <a:p>
-            <a:r>
-              <a:rPr lang="en-US"/>
-              <a:t>Talk about static methods</a:t>
-            </a:r>
-          </a:p>
-          <a:p>
-            <a:r>
-              <a:rPr lang="en-US"/>
-              <a:t>Continue working on writing your own classes</a:t>
-            </a:r>
-          </a:p>
-          <a:p>
-            <a:r>
-              <a:rPr lang="en-US"/>
-              <a:t>Get started on your new assignment</a:t>
+            <a:pPr marL="343080" indent="-342720">
+              <a:lnSpc>
+                <a:spcPct val="100000"/>
+              </a:lnSpc>
+              <a:buClr>
+                <a:srgbClr val="000000"/>
+              </a:buClr>
+              <a:buFont typeface="Arial"/>
+              <a:buChar char="•"/>
+            </a:pPr>
+            <a:r>
+              <a:rPr lang="en-US" sz="3200" b="0" strike="noStrike" spc="-1" dirty="0">
+                <a:solidFill>
+                  <a:srgbClr val="000000"/>
+                </a:solidFill>
+                <a:uFill>
+                  <a:solidFill>
+                    <a:srgbClr val="FFFFFF"/>
+                  </a:solidFill>
+                </a:uFill>
+                <a:latin typeface="Calibri"/>
+              </a:rPr>
+              <a:t>Complete the </a:t>
+            </a:r>
+            <a:r>
+              <a:rPr lang="en-US" sz="3200" b="0" strike="noStrike" spc="-1" dirty="0" err="1">
+                <a:solidFill>
+                  <a:srgbClr val="000000"/>
+                </a:solidFill>
+                <a:uFill>
+                  <a:solidFill>
+                    <a:srgbClr val="FFFFFF"/>
+                  </a:solidFill>
+                </a:uFill>
+                <a:latin typeface="Calibri"/>
+              </a:rPr>
+              <a:t>StudentGradebook</a:t>
+            </a:r>
+            <a:r>
+              <a:rPr lang="en-US" sz="3200" b="0" strike="noStrike" spc="-1" dirty="0">
+                <a:solidFill>
+                  <a:srgbClr val="000000"/>
+                </a:solidFill>
+                <a:uFill>
+                  <a:solidFill>
+                    <a:srgbClr val="FFFFFF"/>
+                  </a:solidFill>
+                </a:uFill>
+                <a:latin typeface="Calibri"/>
+              </a:rPr>
+              <a:t> problem in the </a:t>
+            </a:r>
+            <a:r>
+              <a:rPr lang="en-US" sz="3200" b="0" strike="noStrike" spc="-1" dirty="0" err="1">
+                <a:solidFill>
+                  <a:srgbClr val="000000"/>
+                </a:solidFill>
+                <a:uFill>
+                  <a:solidFill>
+                    <a:srgbClr val="FFFFFF"/>
+                  </a:solidFill>
+                </a:uFill>
+                <a:latin typeface="Calibri"/>
+              </a:rPr>
+              <a:t>SuperSimpleObject</a:t>
+            </a:r>
+            <a:r>
+              <a:rPr lang="en-US" sz="3200" b="0" strike="noStrike" spc="-1" dirty="0">
+                <a:solidFill>
+                  <a:srgbClr val="000000"/>
+                </a:solidFill>
+                <a:uFill>
+                  <a:solidFill>
+                    <a:srgbClr val="FFFFFF"/>
+                  </a:solidFill>
+                </a:uFill>
+                <a:latin typeface="Calibri"/>
+              </a:rPr>
+              <a:t> project (or the one from last class)</a:t>
             </a:r>
           </a:p>
         </p:txBody>
@@ -12548,88 +12105,44 @@
     </p:spTree>
     <p:extLst>
       <p:ext uri="{BB962C8B-B14F-4D97-AF65-F5344CB8AC3E}">
-        <p14:creationId xmlns:p14="http://schemas.microsoft.com/office/powerpoint/2010/main" val="2719131964"/>
+        <p14:creationId xmlns:p14="http://schemas.microsoft.com/office/powerpoint/2010/main" val="1595857429"/>
       </p:ext>
     </p:extLst>
   </p:cSld>
   <p:clrMapOvr>
     <a:masterClrMapping/>
   </p:clrMapOvr>
+  <p:timing>
+    <p:tnLst>
+      <p:par>
+        <p:cTn id="1" dur="indefinite" restart="never" nodeType="tmRoot">
+          <p:childTnLst>
+            <p:seq>
+              <p:cTn id="2" nodeType="mainSeq"/>
+              <p:prevCondLst>
+                <p:cond evt="onPrev" delay="0">
+                  <p:tgtEl>
+                    <p:sldTgt/>
+                  </p:tgtEl>
+                </p:cond>
+              </p:prevCondLst>
+              <p:nextCondLst>
+                <p:cond evt="onNext" delay="0">
+                  <p:tgtEl>
+                    <p:sldTgt/>
+                  </p:tgtEl>
+                </p:cond>
+              </p:nextCondLst>
+            </p:seq>
+          </p:childTnLst>
+        </p:cTn>
+      </p:par>
+    </p:tnLst>
+  </p:timing>
 </p:sld>
 </file>
 
 <file path=ppt/slides/slide20.xml><?xml version="1.0" encoding="utf-8"?>
-<p:sld xmlns:a="http://schemas.openxmlformats.org/drawingml/2006/main" xmlns:r="http://schemas.openxmlformats.org/officeDocument/2006/relationships" xmlns:p="http://schemas.openxmlformats.org/presentationml/2006/main">
-  <p:cSld>
-    <p:spTree>
-      <p:nvGrpSpPr>
-        <p:cNvPr id="1" name=""/>
-        <p:cNvGrpSpPr/>
-        <p:nvPr/>
-      </p:nvGrpSpPr>
-      <p:grpSpPr>
-        <a:xfrm>
-          <a:off x="0" y="0"/>
-          <a:ext cx="0" cy="0"/>
-          <a:chOff x="0" y="0"/>
-          <a:chExt cx="0" cy="0"/>
-        </a:xfrm>
-      </p:grpSpPr>
-      <p:sp>
-        <p:nvSpPr>
-          <p:cNvPr id="2" name="Title 1"/>
-          <p:cNvSpPr>
-            <a:spLocks noGrp="1"/>
-          </p:cNvSpPr>
-          <p:nvPr>
-            <p:ph type="title"/>
-          </p:nvPr>
-        </p:nvSpPr>
-        <p:spPr/>
-        <p:txBody>
-          <a:bodyPr/>
-          <a:lstStyle/>
-          <a:p>
-            <a:r>
-              <a:rPr lang="en-US" dirty="0"/>
-              <a:t>Live code</a:t>
-            </a:r>
-          </a:p>
-        </p:txBody>
-      </p:sp>
-      <p:sp>
-        <p:nvSpPr>
-          <p:cNvPr id="3" name="Content Placeholder 2"/>
-          <p:cNvSpPr>
-            <a:spLocks noGrp="1"/>
-          </p:cNvSpPr>
-          <p:nvPr>
-            <p:ph idx="1"/>
-          </p:nvPr>
-        </p:nvSpPr>
-        <p:spPr/>
-        <p:txBody>
-          <a:bodyPr/>
-          <a:lstStyle/>
-          <a:p>
-            <a:endParaRPr lang="en-US"/>
-          </a:p>
-        </p:txBody>
-      </p:sp>
-    </p:spTree>
-    <p:extLst>
-      <p:ext uri="{BB962C8B-B14F-4D97-AF65-F5344CB8AC3E}">
-        <p14:creationId xmlns:p14="http://schemas.microsoft.com/office/powerpoint/2010/main" val="614844681"/>
-      </p:ext>
-    </p:extLst>
-  </p:cSld>
-  <p:clrMapOvr>
-    <a:masterClrMapping/>
-  </p:clrMapOvr>
-</p:sld>
-</file>
-
-<file path=ppt/slides/slide21.xml><?xml version="1.0" encoding="utf-8"?>
 <p:sld xmlns:a="http://schemas.openxmlformats.org/drawingml/2006/main" xmlns:r="http://schemas.openxmlformats.org/officeDocument/2006/relationships" xmlns:p="http://schemas.openxmlformats.org/presentationml/2006/main">
   <p:cSld>
     <p:spTree>
@@ -12916,7 +12429,7 @@
 </p:sld>
 </file>
 
-<file path=ppt/slides/slide22.xml><?xml version="1.0" encoding="utf-8"?>
+<file path=ppt/slides/slide21.xml><?xml version="1.0" encoding="utf-8"?>
 <p:sld xmlns:a="http://schemas.openxmlformats.org/drawingml/2006/main" xmlns:r="http://schemas.openxmlformats.org/officeDocument/2006/relationships" xmlns:p="http://schemas.openxmlformats.org/presentationml/2006/main">
   <p:cSld>
     <p:spTree>
@@ -13238,7 +12751,7 @@
 </p:sld>
 </file>
 
-<file path=ppt/slides/slide23.xml><?xml version="1.0" encoding="utf-8"?>
+<file path=ppt/slides/slide22.xml><?xml version="1.0" encoding="utf-8"?>
 <p:sld xmlns:a="http://schemas.openxmlformats.org/drawingml/2006/main" xmlns:r="http://schemas.openxmlformats.org/officeDocument/2006/relationships" xmlns:p="http://schemas.openxmlformats.org/presentationml/2006/main">
   <p:cSld>
     <p:spTree>
@@ -14976,225 +14489,6 @@
       </p:grpSpPr>
       <p:sp>
         <p:nvSpPr>
-          <p:cNvPr id="127" name="TextShape 1"/>
-          <p:cNvSpPr txBox="1"/>
-          <p:nvPr/>
-        </p:nvSpPr>
-        <p:spPr>
-          <a:xfrm>
-            <a:off x="457200" y="274680"/>
-            <a:ext cx="8229240" cy="1142640"/>
-          </a:xfrm>
-          <a:prstGeom prst="rect">
-            <a:avLst/>
-          </a:prstGeom>
-          <a:noFill/>
-          <a:ln>
-            <a:noFill/>
-          </a:ln>
-        </p:spPr>
-        <p:txBody>
-          <a:bodyPr anchor="ctr"/>
-          <a:lstStyle/>
-          <a:p>
-            <a:pPr algn="ctr">
-              <a:lnSpc>
-                <a:spcPct val="100000"/>
-              </a:lnSpc>
-            </a:pPr>
-            <a:r>
-              <a:rPr lang="en-US" sz="4400" b="0" strike="noStrike" spc="-1">
-                <a:solidFill>
-                  <a:srgbClr val="000000"/>
-                </a:solidFill>
-                <a:uFill>
-                  <a:solidFill>
-                    <a:srgbClr val="FFFFFF"/>
-                  </a:solidFill>
-                </a:uFill>
-                <a:latin typeface="Calibri"/>
-              </a:rPr>
-              <a:t>Finishing up from last time...</a:t>
-            </a:r>
-            <a:endParaRPr lang="en-US" sz="4400" b="0" strike="noStrike" spc="-1">
-              <a:solidFill>
-                <a:srgbClr val="000000"/>
-              </a:solidFill>
-              <a:uFill>
-                <a:solidFill>
-                  <a:srgbClr val="FFFFFF"/>
-                </a:solidFill>
-              </a:uFill>
-              <a:latin typeface="Arial"/>
-            </a:endParaRPr>
-          </a:p>
-        </p:txBody>
-      </p:sp>
-      <p:sp>
-        <p:nvSpPr>
-          <p:cNvPr id="128" name="TextShape 2"/>
-          <p:cNvSpPr txBox="1"/>
-          <p:nvPr/>
-        </p:nvSpPr>
-        <p:spPr>
-          <a:xfrm>
-            <a:off x="457200" y="1600200"/>
-            <a:ext cx="8229240" cy="4525560"/>
-          </a:xfrm>
-          <a:prstGeom prst="rect">
-            <a:avLst/>
-          </a:prstGeom>
-          <a:noFill/>
-          <a:ln>
-            <a:noFill/>
-          </a:ln>
-        </p:spPr>
-        <p:txBody>
-          <a:bodyPr/>
-          <a:lstStyle/>
-          <a:p>
-            <a:pPr marL="343080" indent="-342720">
-              <a:lnSpc>
-                <a:spcPct val="100000"/>
-              </a:lnSpc>
-              <a:buClr>
-                <a:srgbClr val="000000"/>
-              </a:buClr>
-              <a:buFont typeface="Arial"/>
-              <a:buChar char="•"/>
-            </a:pPr>
-            <a:r>
-              <a:rPr lang="en-US" sz="3200" b="0" strike="noStrike" spc="-1" dirty="0">
-                <a:solidFill>
-                  <a:srgbClr val="000000"/>
-                </a:solidFill>
-                <a:uFill>
-                  <a:solidFill>
-                    <a:srgbClr val="FFFFFF"/>
-                  </a:solidFill>
-                </a:uFill>
-                <a:latin typeface="Calibri"/>
-              </a:rPr>
-              <a:t>Complete the </a:t>
-            </a:r>
-            <a:r>
-              <a:rPr lang="en-US" sz="3200" b="0" strike="noStrike" spc="-1" dirty="0" err="1">
-                <a:solidFill>
-                  <a:srgbClr val="000000"/>
-                </a:solidFill>
-                <a:uFill>
-                  <a:solidFill>
-                    <a:srgbClr val="FFFFFF"/>
-                  </a:solidFill>
-                </a:uFill>
-                <a:latin typeface="Calibri"/>
-              </a:rPr>
-              <a:t>StudentGradebook</a:t>
-            </a:r>
-            <a:r>
-              <a:rPr lang="en-US" sz="3200" b="0" strike="noStrike" spc="-1" dirty="0">
-                <a:solidFill>
-                  <a:srgbClr val="000000"/>
-                </a:solidFill>
-                <a:uFill>
-                  <a:solidFill>
-                    <a:srgbClr val="FFFFFF"/>
-                  </a:solidFill>
-                </a:uFill>
-                <a:latin typeface="Calibri"/>
-              </a:rPr>
-              <a:t> problem in the </a:t>
-            </a:r>
-            <a:r>
-              <a:rPr lang="en-US" sz="3200" b="0" strike="noStrike" spc="-1" dirty="0" err="1">
-                <a:solidFill>
-                  <a:srgbClr val="000000"/>
-                </a:solidFill>
-                <a:uFill>
-                  <a:solidFill>
-                    <a:srgbClr val="FFFFFF"/>
-                  </a:solidFill>
-                </a:uFill>
-                <a:latin typeface="Calibri"/>
-              </a:rPr>
-              <a:t>SuperSimpleObject</a:t>
-            </a:r>
-            <a:r>
-              <a:rPr lang="en-US" sz="3200" b="0" strike="noStrike" spc="-1" dirty="0">
-                <a:solidFill>
-                  <a:srgbClr val="000000"/>
-                </a:solidFill>
-                <a:uFill>
-                  <a:solidFill>
-                    <a:srgbClr val="FFFFFF"/>
-                  </a:solidFill>
-                </a:uFill>
-                <a:latin typeface="Calibri"/>
-              </a:rPr>
-              <a:t> project (or the one from last class)</a:t>
-            </a:r>
-          </a:p>
-        </p:txBody>
-      </p:sp>
-    </p:spTree>
-    <p:extLst>
-      <p:ext uri="{BB962C8B-B14F-4D97-AF65-F5344CB8AC3E}">
-        <p14:creationId xmlns:p14="http://schemas.microsoft.com/office/powerpoint/2010/main" val="1595857429"/>
-      </p:ext>
-    </p:extLst>
-  </p:cSld>
-  <p:clrMapOvr>
-    <a:masterClrMapping/>
-  </p:clrMapOvr>
-  <p:timing>
-    <p:tnLst>
-      <p:par>
-        <p:cTn id="1" dur="indefinite" restart="never" nodeType="tmRoot">
-          <p:childTnLst>
-            <p:seq>
-              <p:cTn id="2" nodeType="mainSeq"/>
-              <p:prevCondLst>
-                <p:cond evt="onPrev" delay="0">
-                  <p:tgtEl>
-                    <p:sldTgt/>
-                  </p:tgtEl>
-                </p:cond>
-              </p:prevCondLst>
-              <p:nextCondLst>
-                <p:cond evt="onNext" delay="0">
-                  <p:tgtEl>
-                    <p:sldTgt/>
-                  </p:tgtEl>
-                </p:cond>
-              </p:nextCondLst>
-            </p:seq>
-          </p:childTnLst>
-        </p:cTn>
-      </p:par>
-    </p:tnLst>
-  </p:timing>
-</p:sld>
-</file>
-
-<file path=ppt/slides/slide4.xml><?xml version="1.0" encoding="utf-8"?>
-<p:sld xmlns:a="http://schemas.openxmlformats.org/drawingml/2006/main" xmlns:r="http://schemas.openxmlformats.org/officeDocument/2006/relationships" xmlns:p="http://schemas.openxmlformats.org/presentationml/2006/main">
-  <p:cSld>
-    <p:spTree>
-      <p:nvGrpSpPr>
-        <p:cNvPr id="1" name=""/>
-        <p:cNvGrpSpPr/>
-        <p:nvPr/>
-      </p:nvGrpSpPr>
-      <p:grpSpPr>
-        <a:xfrm>
-          <a:off x="0" y="0"/>
-          <a:ext cx="0" cy="0"/>
-          <a:chOff x="0" y="0"/>
-          <a:chExt cx="0" cy="0"/>
-        </a:xfrm>
-      </p:grpSpPr>
-      <p:sp>
-        <p:nvSpPr>
           <p:cNvPr id="2" name="Rectangle 1"/>
           <p:cNvSpPr>
             <a:spLocks noGrp="1"/>
@@ -15375,7 +14669,7 @@
 </p:sld>
 </file>
 
-<file path=ppt/slides/slide5.xml><?xml version="1.0" encoding="utf-8"?>
+<file path=ppt/slides/slide4.xml><?xml version="1.0" encoding="utf-8"?>
 <p:sld xmlns:a="http://schemas.openxmlformats.org/drawingml/2006/main" xmlns:r="http://schemas.openxmlformats.org/officeDocument/2006/relationships" xmlns:p="http://schemas.openxmlformats.org/presentationml/2006/main">
   <p:cSld>
     <p:spTree>
@@ -16490,7 +15784,7 @@
 </p:sld>
 </file>
 
-<file path=ppt/slides/slide6.xml><?xml version="1.0" encoding="utf-8"?>
+<file path=ppt/slides/slide5.xml><?xml version="1.0" encoding="utf-8"?>
 <p:sld xmlns:a="http://schemas.openxmlformats.org/drawingml/2006/main" xmlns:r="http://schemas.openxmlformats.org/officeDocument/2006/relationships" xmlns:p="http://schemas.openxmlformats.org/presentationml/2006/main">
   <p:cSld>
     <p:spTree>
@@ -18213,7 +17507,7 @@
 </p:sld>
 </file>
 
-<file path=ppt/slides/slide7.xml><?xml version="1.0" encoding="utf-8"?>
+<file path=ppt/slides/slide6.xml><?xml version="1.0" encoding="utf-8"?>
 <p:sld xmlns:a="http://schemas.openxmlformats.org/drawingml/2006/main" xmlns:r="http://schemas.openxmlformats.org/officeDocument/2006/relationships" xmlns:p="http://schemas.openxmlformats.org/presentationml/2006/main">
   <p:cSld>
     <p:spTree>
@@ -21419,7 +20713,7 @@
 </p:sld>
 </file>
 
-<file path=ppt/slides/slide8.xml><?xml version="1.0" encoding="utf-8"?>
+<file path=ppt/slides/slide7.xml><?xml version="1.0" encoding="utf-8"?>
 <p:sld xmlns:a="http://schemas.openxmlformats.org/drawingml/2006/main" xmlns:r="http://schemas.openxmlformats.org/officeDocument/2006/relationships" xmlns:p="http://schemas.openxmlformats.org/presentationml/2006/main">
   <p:cSld>
     <p:spTree>
@@ -25449,7 +24743,7 @@
 </p:sld>
 </file>
 
-<file path=ppt/slides/slide9.xml><?xml version="1.0" encoding="utf-8"?>
+<file path=ppt/slides/slide8.xml><?xml version="1.0" encoding="utf-8"?>
 <p:sld xmlns:a="http://schemas.openxmlformats.org/drawingml/2006/main" xmlns:r="http://schemas.openxmlformats.org/officeDocument/2006/relationships" xmlns:p="http://schemas.openxmlformats.org/presentationml/2006/main">
   <p:cSld>
     <p:spTree>
@@ -25754,6 +25048,200 @@
     <p:extLst>
       <p:ext uri="{BB962C8B-B14F-4D97-AF65-F5344CB8AC3E}">
         <p14:creationId xmlns:p14="http://schemas.microsoft.com/office/powerpoint/2010/main" val="792907088"/>
+      </p:ext>
+    </p:extLst>
+  </p:cSld>
+  <p:clrMapOvr>
+    <a:masterClrMapping/>
+  </p:clrMapOvr>
+</p:sld>
+</file>
+
+<file path=ppt/slides/slide9.xml><?xml version="1.0" encoding="utf-8"?>
+<p:sld xmlns:a="http://schemas.openxmlformats.org/drawingml/2006/main" xmlns:r="http://schemas.openxmlformats.org/officeDocument/2006/relationships" xmlns:p="http://schemas.openxmlformats.org/presentationml/2006/main">
+  <p:cSld>
+    <p:spTree>
+      <p:nvGrpSpPr>
+        <p:cNvPr id="1" name=""/>
+        <p:cNvGrpSpPr/>
+        <p:nvPr/>
+      </p:nvGrpSpPr>
+      <p:grpSpPr>
+        <a:xfrm>
+          <a:off x="0" y="0"/>
+          <a:ext cx="0" cy="0"/>
+          <a:chOff x="0" y="0"/>
+          <a:chExt cx="0" cy="0"/>
+        </a:xfrm>
+      </p:grpSpPr>
+      <p:sp>
+        <p:nvSpPr>
+          <p:cNvPr id="2" name="Rectangle 1"/>
+          <p:cNvSpPr>
+            <a:spLocks noGrp="1"/>
+          </p:cNvSpPr>
+          <p:nvPr>
+            <p:ph type="ctrTitle"/>
+          </p:nvPr>
+        </p:nvSpPr>
+        <p:spPr/>
+        <p:txBody>
+          <a:bodyPr/>
+          <a:lstStyle/>
+          <a:p>
+            <a:pPr eaLnBrk="1" fontAlgn="auto" hangingPunct="1">
+              <a:spcAft>
+                <a:spcPts val="0"/>
+              </a:spcAft>
+              <a:defRPr/>
+            </a:pPr>
+            <a:r>
+              <a:rPr lang="en-US" dirty="0"/>
+              <a:t>CSSE 220</a:t>
+            </a:r>
+          </a:p>
+        </p:txBody>
+      </p:sp>
+      <p:sp>
+        <p:nvSpPr>
+          <p:cNvPr id="9219" name="Rectangle 2"/>
+          <p:cNvSpPr>
+            <a:spLocks noGrp="1"/>
+          </p:cNvSpPr>
+          <p:nvPr>
+            <p:ph type="subTitle" idx="1"/>
+          </p:nvPr>
+        </p:nvSpPr>
+        <p:spPr/>
+        <p:txBody>
+          <a:bodyPr/>
+          <a:lstStyle/>
+          <a:p>
+            <a:pPr marR="0" eaLnBrk="1" hangingPunct="1">
+              <a:lnSpc>
+                <a:spcPct val="90000"/>
+              </a:lnSpc>
+            </a:pPr>
+            <a:r>
+              <a:rPr lang="en-US" sz="2500" dirty="0"/>
+              <a:t>Static Fields &amp; Methods</a:t>
+            </a:r>
+          </a:p>
+          <a:p>
+            <a:pPr marR="0" eaLnBrk="1" hangingPunct="1">
+              <a:lnSpc>
+                <a:spcPct val="90000"/>
+              </a:lnSpc>
+            </a:pPr>
+            <a:endParaRPr lang="en-US" sz="2500" dirty="0"/>
+          </a:p>
+        </p:txBody>
+      </p:sp>
+      <p:sp>
+        <p:nvSpPr>
+          <p:cNvPr id="3" name="Rectangle 2">
+            <a:extLst>
+              <a:ext uri="{FF2B5EF4-FFF2-40B4-BE49-F238E27FC236}">
+                <a16:creationId xmlns:a16="http://schemas.microsoft.com/office/drawing/2014/main" id="{0D3B4C52-3679-057F-B9FA-C5E3B4259E4D}"/>
+              </a:ext>
+            </a:extLst>
+          </p:cNvPr>
+          <p:cNvSpPr/>
+          <p:nvPr/>
+        </p:nvSpPr>
+        <p:spPr>
+          <a:xfrm>
+            <a:off x="304800" y="4762500"/>
+            <a:ext cx="8534400" cy="1565186"/>
+          </a:xfrm>
+          <a:prstGeom prst="rect">
+            <a:avLst/>
+          </a:prstGeom>
+        </p:spPr>
+        <p:style>
+          <a:lnRef idx="2">
+            <a:schemeClr val="accent3">
+              <a:shade val="50000"/>
+            </a:schemeClr>
+          </a:lnRef>
+          <a:fillRef idx="1">
+            <a:schemeClr val="accent3"/>
+          </a:fillRef>
+          <a:effectRef idx="0">
+            <a:schemeClr val="accent3"/>
+          </a:effectRef>
+          <a:fontRef idx="minor">
+            <a:schemeClr val="lt1"/>
+          </a:fontRef>
+        </p:style>
+        <p:txBody>
+          <a:bodyPr rtlCol="0" anchor="ctr"/>
+          <a:lstStyle/>
+          <a:p>
+            <a:r>
+              <a:rPr lang="en-US" sz="2400" dirty="0">
+                <a:solidFill>
+                  <a:srgbClr val="FFFFFF"/>
+                </a:solidFill>
+              </a:rPr>
+              <a:t>The </a:t>
+            </a:r>
+            <a:r>
+              <a:rPr lang="en-US" sz="2400" i="1" dirty="0">
+                <a:solidFill>
+                  <a:srgbClr val="FFFFFF"/>
+                </a:solidFill>
+              </a:rPr>
+              <a:t>git</a:t>
+            </a:r>
+            <a:r>
+              <a:rPr lang="en-US" sz="2400" dirty="0">
+                <a:solidFill>
+                  <a:srgbClr val="FFFFFF"/>
+                </a:solidFill>
+              </a:rPr>
+              <a:t> projects for today are:</a:t>
+            </a:r>
+          </a:p>
+          <a:p>
+            <a:pPr marL="342900" indent="-342900">
+              <a:buFont typeface="Arial" panose="020B0604020202020204" pitchFamily="34" charset="0"/>
+              <a:buChar char="•"/>
+            </a:pPr>
+            <a:r>
+              <a:rPr lang="en-US" sz="2400" i="1" dirty="0" err="1"/>
+              <a:t>PracticeSuperSimpleObjects</a:t>
+            </a:r>
+            <a:endParaRPr lang="en-US" sz="2400" i="1" dirty="0"/>
+          </a:p>
+          <a:p>
+            <a:pPr marL="342900" indent="-342900">
+              <a:buFont typeface="Arial" panose="020B0604020202020204" pitchFamily="34" charset="0"/>
+              <a:buChar char="•"/>
+            </a:pPr>
+            <a:r>
+              <a:rPr lang="en-US" sz="2400" i="1" dirty="0" err="1"/>
+              <a:t>PracticeSuperSimpleObjectsSolution</a:t>
+            </a:r>
+            <a:endParaRPr lang="en-US" sz="2400" i="1" dirty="0"/>
+          </a:p>
+          <a:p>
+            <a:pPr marL="342900" indent="-342900">
+              <a:buFont typeface="Arial" panose="020B0604020202020204" pitchFamily="34" charset="0"/>
+              <a:buChar char="•"/>
+            </a:pPr>
+            <a:r>
+              <a:rPr lang="en-US" sz="2400" i="1" dirty="0" err="1"/>
+              <a:t>PracticeSuperSimpleObjectsBoxAndPointers</a:t>
+            </a:r>
+            <a:endParaRPr lang="en-US" sz="2400" i="1" dirty="0"/>
+          </a:p>
+        </p:txBody>
+      </p:sp>
+    </p:spTree>
+    <p:extLst>
+      <p:ext uri="{BB962C8B-B14F-4D97-AF65-F5344CB8AC3E}">
+        <p14:creationId xmlns:p14="http://schemas.microsoft.com/office/powerpoint/2010/main" val="2692914782"/>
       </p:ext>
     </p:extLst>
   </p:cSld>
@@ -26214,6 +25702,15 @@
 </file>
 
 <file path=customXml/item1.xml><?xml version="1.0" encoding="utf-8"?>
+<?mso-contentType ?>
+<FormTemplates xmlns="http://schemas.microsoft.com/sharepoint/v3/contenttype/forms">
+  <Display>DocumentLibraryForm</Display>
+  <Edit>DocumentLibraryForm</Edit>
+  <New>DocumentLibraryForm</New>
+</FormTemplates>
+</file>
+
+<file path=customXml/item2.xml><?xml version="1.0" encoding="utf-8"?>
 <ct:contentTypeSchema xmlns:ct="http://schemas.microsoft.com/office/2006/metadata/contentType" xmlns:ma="http://schemas.microsoft.com/office/2006/metadata/properties/metaAttributes" ct:_="" ma:_="" ma:contentTypeName="Document" ma:contentTypeID="0x0101004285D81DBE5F5A448E892B34D6B8CF20" ma:contentTypeVersion="8" ma:contentTypeDescription="Create a new document." ma:contentTypeScope="" ma:versionID="ecce54155d2ea7caa9aed06c8b6b9867">
   <xsd:schema xmlns:xsd="http://www.w3.org/2001/XMLSchema" xmlns:xs="http://www.w3.org/2001/XMLSchema" xmlns:p="http://schemas.microsoft.com/office/2006/metadata/properties" xmlns:ns2="08600313-7276-4ca7-b5d3-7d86193ee0ac" xmlns:ns3="820f9cb1-409d-4c4b-8197-1d4f7dd48124" targetNamespace="http://schemas.microsoft.com/office/2006/metadata/properties" ma:root="true" ma:fieldsID="bfd7385540b70b2fe84ac888cc214377" ns2:_="" ns3:_="">
     <xsd:import namespace="08600313-7276-4ca7-b5d3-7d86193ee0ac"/>
@@ -26390,15 +25887,6 @@
 </ct:contentTypeSchema>
 </file>
 
-<file path=customXml/item2.xml><?xml version="1.0" encoding="utf-8"?>
-<?mso-contentType ?>
-<FormTemplates xmlns="http://schemas.microsoft.com/sharepoint/v3/contenttype/forms">
-  <Display>DocumentLibraryForm</Display>
-  <Edit>DocumentLibraryForm</Edit>
-  <New>DocumentLibraryForm</New>
-</FormTemplates>
-</file>
-
 <file path=customXml/item3.xml><?xml version="1.0" encoding="utf-8"?>
 <p:properties xmlns:p="http://schemas.microsoft.com/office/2006/metadata/properties" xmlns:xsi="http://www.w3.org/2001/XMLSchema-instance" xmlns:pc="http://schemas.microsoft.com/office/infopath/2007/PartnerControls">
   <documentManagement>
@@ -26411,6 +25899,14 @@
 </file>
 
 <file path=customXml/itemProps1.xml><?xml version="1.0" encoding="utf-8"?>
+<ds:datastoreItem xmlns:ds="http://schemas.openxmlformats.org/officeDocument/2006/customXml" ds:itemID="{4CA9CB0E-EE65-449F-9559-F04F36359530}">
+  <ds:schemaRefs>
+    <ds:schemaRef ds:uri="http://schemas.microsoft.com/sharepoint/v3/contenttype/forms"/>
+  </ds:schemaRefs>
+</ds:datastoreItem>
+</file>
+
+<file path=customXml/itemProps2.xml><?xml version="1.0" encoding="utf-8"?>
 <ds:datastoreItem xmlns:ds="http://schemas.openxmlformats.org/officeDocument/2006/customXml" ds:itemID="{4A4DCD66-1C57-4C3C-B2C3-DF827DC9D610}">
   <ds:schemaRefs>
     <ds:schemaRef ds:uri="http://schemas.microsoft.com/office/2006/metadata/contentType"/>
@@ -26429,14 +25925,6 @@
 </ds:datastoreItem>
 </file>
 
-<file path=customXml/itemProps2.xml><?xml version="1.0" encoding="utf-8"?>
-<ds:datastoreItem xmlns:ds="http://schemas.openxmlformats.org/officeDocument/2006/customXml" ds:itemID="{4CA9CB0E-EE65-449F-9559-F04F36359530}">
-  <ds:schemaRefs>
-    <ds:schemaRef ds:uri="http://schemas.microsoft.com/sharepoint/v3/contenttype/forms"/>
-  </ds:schemaRefs>
-</ds:datastoreItem>
-</file>
-
 <file path=customXml/itemProps3.xml><?xml version="1.0" encoding="utf-8"?>
 <ds:datastoreItem xmlns:ds="http://schemas.openxmlformats.org/officeDocument/2006/customXml" ds:itemID="{0BE3997C-5427-46BC-8C47-AFD73EF2B262}">
   <ds:schemaRefs>

--- a/ClassMaterials/SimpleObjects/Slides/Part2-ObjectRefs.pptx
+++ b/ClassMaterials/SimpleObjects/Slides/Part2-ObjectRefs.pptx
@@ -2336,7 +2336,7 @@
               <a:pPr>
                 <a:defRPr/>
               </a:pPr>
-              <a:t>Friday, September 11, 2026</a:t>
+              <a:t>Tuesday, September 15, 2026</a:t>
             </a:fld>
             <a:endParaRPr lang="en-US" dirty="0"/>
           </a:p>
@@ -2519,7 +2519,7 @@
               <a:pPr>
                 <a:defRPr/>
               </a:pPr>
-              <a:t>Friday, September 11, 2026</a:t>
+              <a:t>Tuesday, September 15, 2026</a:t>
             </a:fld>
             <a:endParaRPr lang="en-US" dirty="0"/>
           </a:p>
@@ -4443,7 +4443,7 @@
 </file>
 
 <file path=ppt/slides/slide1.xml><?xml version="1.0" encoding="utf-8"?>
-<p:sld xmlns:a="http://schemas.openxmlformats.org/drawingml/2006/main" xmlns:r="http://schemas.openxmlformats.org/officeDocument/2006/relationships" xmlns:p="http://schemas.openxmlformats.org/presentationml/2006/main">
+<p:sld xmlns:a="http://schemas.openxmlformats.org/drawingml/2006/main" xmlns:r="http://schemas.openxmlformats.org/officeDocument/2006/relationships" xmlns:p="http://schemas.openxmlformats.org/presentationml/2006/main" show="0">
   <p:cSld>
     <p:spTree>
       <p:nvGrpSpPr>
@@ -6058,7 +6058,7 @@
             </a:r>
             <a:r>
               <a:rPr lang="en-US" dirty="0"/>
-              <a:t> value for number types</a:t>
+              <a:t> value for number (primitive) types</a:t>
             </a:r>
           </a:p>
           <a:p>
@@ -15698,17 +15698,6 @@
 </file>
 
 <file path=customXml/item1.xml><?xml version="1.0" encoding="utf-8"?>
-<p:properties xmlns:p="http://schemas.microsoft.com/office/2006/metadata/properties" xmlns:xsi="http://www.w3.org/2001/XMLSchema-instance" xmlns:pc="http://schemas.microsoft.com/office/infopath/2007/PartnerControls">
-  <documentManagement>
-    <TaxCatchAll xmlns="820f9cb1-409d-4c4b-8197-1d4f7dd48124" xsi:nil="true"/>
-    <lcf76f155ced4ddcb4097134ff3c332f xmlns="08600313-7276-4ca7-b5d3-7d86193ee0ac">
-      <Terms xmlns="http://schemas.microsoft.com/office/infopath/2007/PartnerControls"/>
-    </lcf76f155ced4ddcb4097134ff3c332f>
-  </documentManagement>
-</p:properties>
-</file>
-
-<file path=customXml/item2.xml><?xml version="1.0" encoding="utf-8"?>
 <ct:contentTypeSchema xmlns:ct="http://schemas.microsoft.com/office/2006/metadata/contentType" xmlns:ma="http://schemas.microsoft.com/office/2006/metadata/properties/metaAttributes" ct:_="" ma:_="" ma:contentTypeName="Document" ma:contentTypeID="0x0101004285D81DBE5F5A448E892B34D6B8CF20" ma:contentTypeVersion="8" ma:contentTypeDescription="Create a new document." ma:contentTypeScope="" ma:versionID="ecce54155d2ea7caa9aed06c8b6b9867">
   <xsd:schema xmlns:xsd="http://www.w3.org/2001/XMLSchema" xmlns:xs="http://www.w3.org/2001/XMLSchema" xmlns:p="http://schemas.microsoft.com/office/2006/metadata/properties" xmlns:ns2="08600313-7276-4ca7-b5d3-7d86193ee0ac" xmlns:ns3="820f9cb1-409d-4c4b-8197-1d4f7dd48124" targetNamespace="http://schemas.microsoft.com/office/2006/metadata/properties" ma:root="true" ma:fieldsID="bfd7385540b70b2fe84ac888cc214377" ns2:_="" ns3:_="">
     <xsd:import namespace="08600313-7276-4ca7-b5d3-7d86193ee0ac"/>
@@ -15885,6 +15874,17 @@
 </ct:contentTypeSchema>
 </file>
 
+<file path=customXml/item2.xml><?xml version="1.0" encoding="utf-8"?>
+<p:properties xmlns:p="http://schemas.microsoft.com/office/2006/metadata/properties" xmlns:xsi="http://www.w3.org/2001/XMLSchema-instance" xmlns:pc="http://schemas.microsoft.com/office/infopath/2007/PartnerControls">
+  <documentManagement>
+    <TaxCatchAll xmlns="820f9cb1-409d-4c4b-8197-1d4f7dd48124" xsi:nil="true"/>
+    <lcf76f155ced4ddcb4097134ff3c332f xmlns="08600313-7276-4ca7-b5d3-7d86193ee0ac">
+      <Terms xmlns="http://schemas.microsoft.com/office/infopath/2007/PartnerControls"/>
+    </lcf76f155ced4ddcb4097134ff3c332f>
+  </documentManagement>
+</p:properties>
+</file>
+
 <file path=customXml/item3.xml><?xml version="1.0" encoding="utf-8"?>
 <?mso-contentType ?>
 <FormTemplates xmlns="http://schemas.microsoft.com/sharepoint/v3/contenttype/forms">
@@ -15895,17 +15895,6 @@
 </file>
 
 <file path=customXml/itemProps1.xml><?xml version="1.0" encoding="utf-8"?>
-<ds:datastoreItem xmlns:ds="http://schemas.openxmlformats.org/officeDocument/2006/customXml" ds:itemID="{0BE3997C-5427-46BC-8C47-AFD73EF2B262}">
-  <ds:schemaRefs>
-    <ds:schemaRef ds:uri="http://schemas.microsoft.com/office/2006/metadata/properties"/>
-    <ds:schemaRef ds:uri="http://schemas.microsoft.com/office/infopath/2007/PartnerControls"/>
-    <ds:schemaRef ds:uri="820f9cb1-409d-4c4b-8197-1d4f7dd48124"/>
-    <ds:schemaRef ds:uri="08600313-7276-4ca7-b5d3-7d86193ee0ac"/>
-  </ds:schemaRefs>
-</ds:datastoreItem>
-</file>
-
-<file path=customXml/itemProps2.xml><?xml version="1.0" encoding="utf-8"?>
 <ds:datastoreItem xmlns:ds="http://schemas.openxmlformats.org/officeDocument/2006/customXml" ds:itemID="{4A4DCD66-1C57-4C3C-B2C3-DF827DC9D610}">
   <ds:schemaRefs>
     <ds:schemaRef ds:uri="http://schemas.microsoft.com/office/2006/metadata/contentType"/>
@@ -15924,6 +15913,17 @@
 </ds:datastoreItem>
 </file>
 
+<file path=customXml/itemProps2.xml><?xml version="1.0" encoding="utf-8"?>
+<ds:datastoreItem xmlns:ds="http://schemas.openxmlformats.org/officeDocument/2006/customXml" ds:itemID="{0BE3997C-5427-46BC-8C47-AFD73EF2B262}">
+  <ds:schemaRefs>
+    <ds:schemaRef ds:uri="http://schemas.microsoft.com/office/2006/metadata/properties"/>
+    <ds:schemaRef ds:uri="http://schemas.microsoft.com/office/infopath/2007/PartnerControls"/>
+    <ds:schemaRef ds:uri="820f9cb1-409d-4c4b-8197-1d4f7dd48124"/>
+    <ds:schemaRef ds:uri="08600313-7276-4ca7-b5d3-7d86193ee0ac"/>
+  </ds:schemaRefs>
+</ds:datastoreItem>
+</file>
+
 <file path=customXml/itemProps3.xml><?xml version="1.0" encoding="utf-8"?>
 <ds:datastoreItem xmlns:ds="http://schemas.openxmlformats.org/officeDocument/2006/customXml" ds:itemID="{4CA9CB0E-EE65-449F-9559-F04F36359530}">
   <ds:schemaRefs>
